--- a/paper/IndicRAG-QA-slides.pptx
+++ b/paper/IndicRAG-QA-slides.pptx
@@ -725,7 +725,7 @@
           <a:lstStyle/>
           <a:p>
             <a:r>
-              <a:t>A property of the signal, not of the calibration. Worth stating because the threshold approach is the common default.</a:t>
+              <a:t>A property of the signal, not the calibration. The fitted operating point swings from 0.000 recall to 0.93 depending only on the split, while the curve underneath stays flat — which is why the separation table matters more than any single number. Motivates the NLI signal.</a:t>
             </a:r>
           </a:p>
         </p:txBody>
@@ -5030,7 +5030,7 @@
                 </a:solidFill>
                 <a:latin typeface="Calibri"/>
               </a:rPr>
-              <a:t>A second decomposition: answerability</a:t>
+              <a:t>A second negative result: answerability</a:t>
             </a:r>
           </a:p>
         </p:txBody>
@@ -5069,7 +5069,7 @@
                 </a:solidFill>
                 <a:latin typeface="Calibri"/>
               </a:rPr>
-              <a:t>Retrieval-score thresholds detect 0.000 of false-premise questions.</a:t>
+              <a:t>Retrieval-score thresholds carry no information about answerability here.</a:t>
             </a:r>
           </a:p>
           <a:p>
@@ -5085,7 +5085,7 @@
                 </a:solidFill>
                 <a:latin typeface="Calibri"/>
               </a:rPr>
-              <a:t>Mechanism: a false-premise question retrieves confidently — the scheme it</a:t>
+              <a:t>Unanswerable questions score higher. Precision stays at the 0.20 base rate at</a:t>
             </a:r>
           </a:p>
           <a:p>
@@ -5101,7 +5101,7 @@
                 </a:solidFill>
                 <a:latin typeface="Calibri"/>
               </a:rPr>
-              <a:t>names is real, its passages score highly. No threshold over retrieval scores can</a:t>
+              <a:t>every threshold.</a:t>
             </a:r>
           </a:p>
           <a:p>
@@ -5117,7 +5117,7 @@
                 </a:solidFill>
                 <a:latin typeface="Calibri"/>
               </a:rPr>
-              <a:t>separate it from an answerable question.</a:t>
+              <a:t>Why: 55 of 80 unanswerable items are about schemes that ARE in the corpus.</a:t>
             </a:r>
           </a:p>
           <a:p>
@@ -5133,14 +5133,271 @@
                 </a:solidFill>
                 <a:latin typeface="Calibri"/>
               </a:rPr>
-              <a:t>→ NLI entailment signal, validated on exactly those cases.</a:t>
-            </a:r>
-          </a:p>
-        </p:txBody>
-      </p:sp>
-      <p:sp>
-        <p:nvSpPr>
-          <p:cNvPr id="4" name="TextBox 3"/>
+              <a:t>A retrieval threshold detects corpus absence — and answerability is not corpus</a:t>
+            </a:r>
+          </a:p>
+          <a:p>
+            <a:pPr>
+              <a:spcAft>
+                <a:spcPts val="600"/>
+              </a:spcAft>
+            </a:pPr>
+            <a:r>
+              <a:rPr sz="1800" b="0">
+                <a:solidFill>
+                  <a:srgbClr val="1A1A1A"/>
+                </a:solidFill>
+                <a:latin typeface="Calibri"/>
+              </a:rPr>
+              <a:t>absence.</a:t>
+            </a:r>
+          </a:p>
+        </p:txBody>
+      </p:sp>
+      <p:graphicFrame>
+        <p:nvGraphicFramePr>
+          <p:cNvPr id="4" name="Table 3"/>
+          <p:cNvGraphicFramePr>
+            <a:graphicFrameLocks noGrp="1"/>
+          </p:cNvGraphicFramePr>
+          <p:nvPr/>
+        </p:nvGraphicFramePr>
+        <p:xfrm>
+          <a:off x="640080" y="3767328"/>
+          <a:ext cx="10058400" cy="1170432"/>
+        </p:xfrm>
+        <a:graphic>
+          <a:graphicData uri="http://schemas.openxmlformats.org/drawingml/2006/table">
+            <a:tbl>
+              <a:tblPr firstRow="1" bandRow="1">
+                <a:tableStyleId>{5C22544A-7EE6-4342-B048-85BDC9FD1C3A}</a:tableStyleId>
+              </a:tblPr>
+              <a:tblGrid>
+                <a:gridCol w="3352800"/>
+                <a:gridCol w="3352800"/>
+                <a:gridCol w="3352800"/>
+              </a:tblGrid>
+              <a:tr h="292608">
+                <a:tc>
+                  <a:txBody>
+                    <a:bodyPr/>
+                    <a:lstStyle/>
+                    <a:p/>
+                  </a:txBody>
+                  <a:tcPr/>
+                </a:tc>
+                <a:tc>
+                  <a:txBody>
+                    <a:bodyPr/>
+                    <a:lstStyle/>
+                    <a:p>
+                      <a:r>
+                        <a:rPr sz="1300" b="1">
+                          <a:solidFill>
+                            <a:srgbClr val="1A1A1A"/>
+                          </a:solidFill>
+                          <a:latin typeface="Calibri"/>
+                        </a:rPr>
+                        <a:t>answerable</a:t>
+                      </a:r>
+                    </a:p>
+                  </a:txBody>
+                  <a:tcPr/>
+                </a:tc>
+                <a:tc>
+                  <a:txBody>
+                    <a:bodyPr/>
+                    <a:lstStyle/>
+                    <a:p>
+                      <a:r>
+                        <a:rPr sz="1300" b="1">
+                          <a:solidFill>
+                            <a:srgbClr val="1A1A1A"/>
+                          </a:solidFill>
+                          <a:latin typeface="Calibri"/>
+                        </a:rPr>
+                        <a:t>unanswerable</a:t>
+                      </a:r>
+                    </a:p>
+                  </a:txBody>
+                  <a:tcPr/>
+                </a:tc>
+              </a:tr>
+              <a:tr h="292608">
+                <a:tc>
+                  <a:txBody>
+                    <a:bodyPr/>
+                    <a:lstStyle/>
+                    <a:p>
+                      <a:r>
+                        <a:rPr sz="1300" b="0">
+                          <a:solidFill>
+                            <a:srgbClr val="1A1A1A"/>
+                          </a:solidFill>
+                          <a:latin typeface="Calibri"/>
+                        </a:rPr>
+                        <a:t>BM25</a:t>
+                      </a:r>
+                    </a:p>
+                  </a:txBody>
+                  <a:tcPr/>
+                </a:tc>
+                <a:tc>
+                  <a:txBody>
+                    <a:bodyPr/>
+                    <a:lstStyle/>
+                    <a:p>
+                      <a:r>
+                        <a:rPr sz="1300" b="0">
+                          <a:solidFill>
+                            <a:srgbClr val="1A1A1A"/>
+                          </a:solidFill>
+                          <a:latin typeface="Calibri"/>
+                        </a:rPr>
+                        <a:t>13.55</a:t>
+                      </a:r>
+                    </a:p>
+                  </a:txBody>
+                  <a:tcPr/>
+                </a:tc>
+                <a:tc>
+                  <a:txBody>
+                    <a:bodyPr/>
+                    <a:lstStyle/>
+                    <a:p>
+                      <a:r>
+                        <a:rPr sz="1300" b="0">
+                          <a:solidFill>
+                            <a:srgbClr val="1A1A1A"/>
+                          </a:solidFill>
+                          <a:latin typeface="Calibri"/>
+                        </a:rPr>
+                        <a:t>13.82</a:t>
+                      </a:r>
+                    </a:p>
+                  </a:txBody>
+                  <a:tcPr/>
+                </a:tc>
+              </a:tr>
+              <a:tr h="292608">
+                <a:tc>
+                  <a:txBody>
+                    <a:bodyPr/>
+                    <a:lstStyle/>
+                    <a:p>
+                      <a:r>
+                        <a:rPr sz="1300" b="0">
+                          <a:solidFill>
+                            <a:srgbClr val="1A1A1A"/>
+                          </a:solidFill>
+                          <a:latin typeface="Calibri"/>
+                        </a:rPr>
+                        <a:t>TF-IDF</a:t>
+                      </a:r>
+                    </a:p>
+                  </a:txBody>
+                  <a:tcPr/>
+                </a:tc>
+                <a:tc>
+                  <a:txBody>
+                    <a:bodyPr/>
+                    <a:lstStyle/>
+                    <a:p>
+                      <a:r>
+                        <a:rPr sz="1300" b="0">
+                          <a:solidFill>
+                            <a:srgbClr val="1A1A1A"/>
+                          </a:solidFill>
+                          <a:latin typeface="Calibri"/>
+                        </a:rPr>
+                        <a:t>0.1424</a:t>
+                      </a:r>
+                    </a:p>
+                  </a:txBody>
+                  <a:tcPr/>
+                </a:tc>
+                <a:tc>
+                  <a:txBody>
+                    <a:bodyPr/>
+                    <a:lstStyle/>
+                    <a:p>
+                      <a:r>
+                        <a:rPr sz="1300" b="0">
+                          <a:solidFill>
+                            <a:srgbClr val="1A1A1A"/>
+                          </a:solidFill>
+                          <a:latin typeface="Calibri"/>
+                        </a:rPr>
+                        <a:t>0.1485</a:t>
+                      </a:r>
+                    </a:p>
+                  </a:txBody>
+                  <a:tcPr/>
+                </a:tc>
+              </a:tr>
+              <a:tr h="292608">
+                <a:tc>
+                  <a:txBody>
+                    <a:bodyPr/>
+                    <a:lstStyle/>
+                    <a:p>
+                      <a:r>
+                        <a:rPr sz="1300" b="0">
+                          <a:solidFill>
+                            <a:srgbClr val="1A1A1A"/>
+                          </a:solidFill>
+                          <a:latin typeface="Calibri"/>
+                        </a:rPr>
+                        <a:t>RRF</a:t>
+                      </a:r>
+                    </a:p>
+                  </a:txBody>
+                  <a:tcPr/>
+                </a:tc>
+                <a:tc>
+                  <a:txBody>
+                    <a:bodyPr/>
+                    <a:lstStyle/>
+                    <a:p>
+                      <a:r>
+                        <a:rPr sz="1300" b="0">
+                          <a:solidFill>
+                            <a:srgbClr val="1A1A1A"/>
+                          </a:solidFill>
+                          <a:latin typeface="Calibri"/>
+                        </a:rPr>
+                        <a:t>0.0327</a:t>
+                      </a:r>
+                    </a:p>
+                  </a:txBody>
+                  <a:tcPr/>
+                </a:tc>
+                <a:tc>
+                  <a:txBody>
+                    <a:bodyPr/>
+                    <a:lstStyle/>
+                    <a:p>
+                      <a:r>
+                        <a:rPr sz="1300" b="0">
+                          <a:solidFill>
+                            <a:srgbClr val="1A1A1A"/>
+                          </a:solidFill>
+                          <a:latin typeface="Calibri"/>
+                        </a:rPr>
+                        <a:t>0.0325</a:t>
+                      </a:r>
+                    </a:p>
+                  </a:txBody>
+                  <a:tcPr/>
+                </a:tc>
+              </a:tr>
+            </a:tbl>
+          </a:graphicData>
+        </a:graphic>
+      </p:graphicFrame>
+      <p:sp>
+        <p:nvSpPr>
+          <p:cNvPr id="5" name="TextBox 4"/>
           <p:cNvSpPr txBox="1"/>
           <p:nvPr/>
         </p:nvSpPr>

--- a/paper/IndicRAG-QA-slides.pptx
+++ b/paper/IndicRAG-QA-slides.pptx
@@ -19,6 +19,8 @@
     <p:sldId id="267" r:id="rId19"/>
     <p:sldId id="268" r:id="rId20"/>
     <p:sldId id="269" r:id="rId21"/>
+    <p:sldId id="270" r:id="rId22"/>
+    <p:sldId id="271" r:id="rId23"/>
   </p:sldIdLst>
   <p:sldSz cx="12191695" cy="6858000" type="screen4x3"/>
   <p:notesSz cx="6858000" cy="9144000"/>
@@ -655,7 +657,7 @@
           <a:lstStyle/>
           <a:p>
             <a:r>
-              <a:t>Two retrievers of equal accuracy can combine well or destructively depending on whether each could have retrieved what the other did.</a:t>
+              <a:t>This is H3 and it is the cleanest result in the deck. The closed-book arm is not refusing — it is confidently reciting eligibility thresholds from memory and getting them wrong.</a:t>
             </a:r>
           </a:p>
         </p:txBody>
@@ -725,7 +727,7 @@
           <a:lstStyle/>
           <a:p>
             <a:r>
-              <a:t>A property of the signal, not the calibration. The fitted operating point swings from 0.000 recall to 0.93 depending only on the split, while the curve underneath stays flat — which is why the separation table matters more than any single number. Motivates the NLI signal.</a:t>
+              <a:t>The slide that stops the talk being a sales pitch. The fusion result is a claim about retrieval, measured as retrieval. It is not a claim that retrieval is what limits answer quality here. This ratio is a property of a 3B quantized model, not a law — but it is why the oracle arm exists.</a:t>
             </a:r>
           </a:p>
         </p:txBody>
@@ -795,7 +797,7 @@
           <a:lstStyle/>
           <a:p>
             <a:r>
-              <a:t>Say these before the Q&amp;A rather than during it.</a:t>
+              <a:t>Two retrievers of equal accuracy can combine well or destructively depending on whether each could have retrieved what the other did.</a:t>
             </a:r>
           </a:p>
         </p:txBody>
@@ -821,6 +823,146 @@
 </file>
 
 <file path=ppt/notesSlides/notesSlide14.xml><?xml version="1.0" encoding="utf-8"?>
+<p:notes xmlns:a="http://schemas.openxmlformats.org/drawingml/2006/main" xmlns:p="http://schemas.openxmlformats.org/presentationml/2006/main" xmlns:r="http://schemas.openxmlformats.org/officeDocument/2006/relationships">
+  <p:cSld>
+    <p:spTree>
+      <p:nvGrpSpPr>
+        <p:cNvPr id="1" name=""/>
+        <p:cNvGrpSpPr/>
+        <p:nvPr/>
+      </p:nvGrpSpPr>
+      <p:grpSpPr>
+        <a:xfrm>
+          <a:off x="0" y="0"/>
+          <a:ext cx="0" cy="0"/>
+          <a:chOff x="0" y="0"/>
+          <a:chExt cx="0" cy="0"/>
+        </a:xfrm>
+      </p:grpSpPr>
+      <p:sp>
+        <p:nvSpPr>
+          <p:cNvPr id="2" name="Slide Image Placeholder 1"/>
+          <p:cNvSpPr>
+            <a:spLocks noGrp="1"/>
+          </p:cNvSpPr>
+          <p:nvPr>
+            <p:ph type="sldImg" idx="2"/>
+          </p:nvPr>
+        </p:nvSpPr>
+        <p:spPr/>
+      </p:sp>
+      <p:sp>
+        <p:nvSpPr>
+          <p:cNvPr id="3" name="Notes Placeholder 2"/>
+          <p:cNvSpPr>
+            <a:spLocks noGrp="1"/>
+          </p:cNvSpPr>
+          <p:nvPr>
+            <p:ph type="body" idx="3" sz="quarter"/>
+          </p:nvPr>
+        </p:nvSpPr>
+        <p:spPr/>
+        <p:txBody>
+          <a:bodyPr/>
+          <a:lstStyle/>
+          <a:p>
+            <a:r>
+              <a:t>A property of the signal, not the calibration. The fitted operating point swings from 0.000 recall to 0.93 depending only on the split, while the curve underneath stays flat — which is why the separation table matters more than any single number. Motivates the NLI signal.</a:t>
+            </a:r>
+          </a:p>
+        </p:txBody>
+      </p:sp>
+      <p:sp>
+        <p:nvSpPr>
+          <p:cNvPr id="4" name="Slide Number Placeholder 3"/>
+          <p:cNvSpPr>
+            <a:spLocks noGrp="1"/>
+          </p:cNvSpPr>
+          <p:nvPr>
+            <p:ph type="sldNum" idx="5" sz="quarter"/>
+          </p:nvPr>
+        </p:nvSpPr>
+        <p:spPr/>
+      </p:sp>
+    </p:spTree>
+  </p:cSld>
+  <p:clrMapOvr>
+    <a:masterClrMapping/>
+  </p:clrMapOvr>
+</p:notes>
+</file>
+
+<file path=ppt/notesSlides/notesSlide15.xml><?xml version="1.0" encoding="utf-8"?>
+<p:notes xmlns:a="http://schemas.openxmlformats.org/drawingml/2006/main" xmlns:p="http://schemas.openxmlformats.org/presentationml/2006/main" xmlns:r="http://schemas.openxmlformats.org/officeDocument/2006/relationships">
+  <p:cSld>
+    <p:spTree>
+      <p:nvGrpSpPr>
+        <p:cNvPr id="1" name=""/>
+        <p:cNvGrpSpPr/>
+        <p:nvPr/>
+      </p:nvGrpSpPr>
+      <p:grpSpPr>
+        <a:xfrm>
+          <a:off x="0" y="0"/>
+          <a:ext cx="0" cy="0"/>
+          <a:chOff x="0" y="0"/>
+          <a:chExt cx="0" cy="0"/>
+        </a:xfrm>
+      </p:grpSpPr>
+      <p:sp>
+        <p:nvSpPr>
+          <p:cNvPr id="2" name="Slide Image Placeholder 1"/>
+          <p:cNvSpPr>
+            <a:spLocks noGrp="1"/>
+          </p:cNvSpPr>
+          <p:nvPr>
+            <p:ph type="sldImg" idx="2"/>
+          </p:nvPr>
+        </p:nvSpPr>
+        <p:spPr/>
+      </p:sp>
+      <p:sp>
+        <p:nvSpPr>
+          <p:cNvPr id="3" name="Notes Placeholder 2"/>
+          <p:cNvSpPr>
+            <a:spLocks noGrp="1"/>
+          </p:cNvSpPr>
+          <p:nvPr>
+            <p:ph type="body" idx="3" sz="quarter"/>
+          </p:nvPr>
+        </p:nvSpPr>
+        <p:spPr/>
+        <p:txBody>
+          <a:bodyPr/>
+          <a:lstStyle/>
+          <a:p>
+            <a:r>
+              <a:t>Say these before the Q&amp;A rather than during it.</a:t>
+            </a:r>
+          </a:p>
+        </p:txBody>
+      </p:sp>
+      <p:sp>
+        <p:nvSpPr>
+          <p:cNvPr id="4" name="Slide Number Placeholder 3"/>
+          <p:cNvSpPr>
+            <a:spLocks noGrp="1"/>
+          </p:cNvSpPr>
+          <p:nvPr>
+            <p:ph type="sldNum" idx="5" sz="quarter"/>
+          </p:nvPr>
+        </p:nvSpPr>
+        <p:spPr/>
+      </p:sp>
+    </p:spTree>
+  </p:cSld>
+  <p:clrMapOvr>
+    <a:masterClrMapping/>
+  </p:clrMapOvr>
+</p:notes>
+</file>
+
+<file path=ppt/notesSlides/notesSlide16.xml><?xml version="1.0" encoding="utf-8"?>
 <p:notes xmlns:a="http://schemas.openxmlformats.org/drawingml/2006/main" xmlns:p="http://schemas.openxmlformats.org/presentationml/2006/main" xmlns:r="http://schemas.openxmlformats.org/officeDocument/2006/relationships">
   <p:cSld>
     <p:spTree>
@@ -4815,7 +4957,7 @@
                 </a:solidFill>
                 <a:latin typeface="Calibri"/>
               </a:rPr>
-              <a:t>Where this generalises</a:t>
+              <a:t>Does it actually help the answers?</a:t>
             </a:r>
           </a:p>
         </p:txBody>
@@ -4854,7 +4996,7 @@
                 </a:solidFill>
                 <a:latin typeface="Calibri"/>
               </a:rPr>
-              <a:t>Not about Hindi. Not about script.</a:t>
+              <a:t>Four arms, same generator, differing only in the evidence given.</a:t>
             </a:r>
           </a:p>
           <a:p>
@@ -4870,7 +5012,7 @@
                 </a:solidFill>
                 <a:latin typeface="Calibri"/>
               </a:rPr>
-              <a:t>Anywhere rank fusion runs over retrievers with asymmetric coverage:</a:t>
+              <a:t>Closed-book answers 37 of 72 questions. 16% of those answers are supported</a:t>
             </a:r>
           </a:p>
           <a:p>
@@ -4886,7 +5028,7 @@
                 </a:solidFill>
                 <a:latin typeface="Calibri"/>
               </a:rPr>
-              <a:t>- text × image/table retrieval — each blind to the other's modality</a:t>
+              <a:t>by the evidence.</a:t>
             </a:r>
           </a:p>
           <a:p>
@@ -4902,7 +5044,7 @@
                 </a:solidFill>
                 <a:latin typeface="Calibri"/>
               </a:rPr>
-              <a:t>- access-controlled shards — one retriever permitted a subset</a:t>
+              <a:t>Script-aware fusion propagates: hybrid beats dense on support and abstains</a:t>
             </a:r>
           </a:p>
           <a:p>
@@ -4918,30 +5060,412 @@
                 </a:solidFill>
                 <a:latin typeface="Calibri"/>
               </a:rPr>
-              <a:t>- specialist × general index over partly-covered collections</a:t>
-            </a:r>
-          </a:p>
-          <a:p>
-            <a:pPr>
-              <a:spcAft>
-                <a:spcPts val="600"/>
-              </a:spcAft>
-            </a:pPr>
-            <a:r>
-              <a:rPr sz="1800" b="0">
-                <a:solidFill>
-                  <a:srgbClr val="1A1A1A"/>
-                </a:solidFill>
-                <a:latin typeface="Calibri"/>
-              </a:rPr>
-              <a:t>Guidance: before fusing, check retriever coverage, not only quality.</a:t>
-            </a:r>
-          </a:p>
-        </p:txBody>
-      </p:sp>
-      <p:sp>
-        <p:nvSpPr>
-          <p:cNvPr id="4" name="TextBox 3"/>
+              <a:t>less, same model, same questions.</a:t>
+            </a:r>
+          </a:p>
+        </p:txBody>
+      </p:sp>
+      <p:graphicFrame>
+        <p:nvGraphicFramePr>
+          <p:cNvPr id="4" name="Table 3"/>
+          <p:cNvGraphicFramePr>
+            <a:graphicFrameLocks noGrp="1"/>
+          </p:cNvGraphicFramePr>
+          <p:nvPr/>
+        </p:nvGraphicFramePr>
+        <p:xfrm>
+          <a:off x="640080" y="3383280"/>
+          <a:ext cx="10058400" cy="1463040"/>
+        </p:xfrm>
+        <a:graphic>
+          <a:graphicData uri="http://schemas.openxmlformats.org/drawingml/2006/table">
+            <a:tbl>
+              <a:tblPr firstRow="1" bandRow="1">
+                <a:tableStyleId>{5C22544A-7EE6-4342-B048-85BDC9FD1C3A}</a:tableStyleId>
+              </a:tblPr>
+              <a:tblGrid>
+                <a:gridCol w="2514600"/>
+                <a:gridCol w="2514600"/>
+                <a:gridCol w="2514600"/>
+                <a:gridCol w="2514600"/>
+              </a:tblGrid>
+              <a:tr h="292608">
+                <a:tc>
+                  <a:txBody>
+                    <a:bodyPr/>
+                    <a:lstStyle/>
+                    <a:p>
+                      <a:r>
+                        <a:rPr sz="1300" b="1">
+                          <a:solidFill>
+                            <a:srgbClr val="1A1A1A"/>
+                          </a:solidFill>
+                          <a:latin typeface="Calibri"/>
+                        </a:rPr>
+                        <a:t>Arm</a:t>
+                      </a:r>
+                    </a:p>
+                  </a:txBody>
+                  <a:tcPr/>
+                </a:tc>
+                <a:tc>
+                  <a:txBody>
+                    <a:bodyPr/>
+                    <a:lstStyle/>
+                    <a:p>
+                      <a:r>
+                        <a:rPr sz="1300" b="1">
+                          <a:solidFill>
+                            <a:srgbClr val="1A1A1A"/>
+                          </a:solidFill>
+                          <a:latin typeface="Calibri"/>
+                        </a:rPr>
+                        <a:t>token-F1</a:t>
+                      </a:r>
+                    </a:p>
+                  </a:txBody>
+                  <a:tcPr/>
+                </a:tc>
+                <a:tc>
+                  <a:txBody>
+                    <a:bodyPr/>
+                    <a:lstStyle/>
+                    <a:p>
+                      <a:r>
+                        <a:rPr sz="1300" b="1">
+                          <a:solidFill>
+                            <a:srgbClr val="1A1A1A"/>
+                          </a:solidFill>
+                          <a:latin typeface="Calibri"/>
+                        </a:rPr>
+                        <a:t>abstains</a:t>
+                      </a:r>
+                    </a:p>
+                  </a:txBody>
+                  <a:tcPr/>
+                </a:tc>
+                <a:tc>
+                  <a:txBody>
+                    <a:bodyPr/>
+                    <a:lstStyle/>
+                    <a:p>
+                      <a:r>
+                        <a:rPr sz="1300" b="1">
+                          <a:solidFill>
+                            <a:srgbClr val="1A1A1A"/>
+                          </a:solidFill>
+                          <a:latin typeface="Calibri"/>
+                        </a:rPr>
+                        <a:t>Citation Support</a:t>
+                      </a:r>
+                    </a:p>
+                  </a:txBody>
+                  <a:tcPr/>
+                </a:tc>
+              </a:tr>
+              <a:tr h="292608">
+                <a:tc>
+                  <a:txBody>
+                    <a:bodyPr/>
+                    <a:lstStyle/>
+                    <a:p>
+                      <a:r>
+                        <a:rPr sz="1300" b="0">
+                          <a:solidFill>
+                            <a:srgbClr val="1A1A1A"/>
+                          </a:solidFill>
+                          <a:latin typeface="Calibri"/>
+                        </a:rPr>
+                        <a:t>closed-book</a:t>
+                      </a:r>
+                    </a:p>
+                  </a:txBody>
+                  <a:tcPr/>
+                </a:tc>
+                <a:tc>
+                  <a:txBody>
+                    <a:bodyPr/>
+                    <a:lstStyle/>
+                    <a:p>
+                      <a:r>
+                        <a:rPr sz="1300" b="0">
+                          <a:solidFill>
+                            <a:srgbClr val="1A1A1A"/>
+                          </a:solidFill>
+                          <a:latin typeface="Calibri"/>
+                        </a:rPr>
+                        <a:t>0.065</a:t>
+                      </a:r>
+                    </a:p>
+                  </a:txBody>
+                  <a:tcPr/>
+                </a:tc>
+                <a:tc>
+                  <a:txBody>
+                    <a:bodyPr/>
+                    <a:lstStyle/>
+                    <a:p>
+                      <a:r>
+                        <a:rPr sz="1300" b="0">
+                          <a:solidFill>
+                            <a:srgbClr val="1A1A1A"/>
+                          </a:solidFill>
+                          <a:latin typeface="Calibri"/>
+                        </a:rPr>
+                        <a:t>0.486</a:t>
+                      </a:r>
+                    </a:p>
+                  </a:txBody>
+                  <a:tcPr/>
+                </a:tc>
+                <a:tc>
+                  <a:txBody>
+                    <a:bodyPr/>
+                    <a:lstStyle/>
+                    <a:p>
+                      <a:r>
+                        <a:rPr sz="1300" b="0">
+                          <a:solidFill>
+                            <a:srgbClr val="1A1A1A"/>
+                          </a:solidFill>
+                          <a:latin typeface="Calibri"/>
+                        </a:rPr>
+                        <a:t>0.162</a:t>
+                      </a:r>
+                    </a:p>
+                  </a:txBody>
+                  <a:tcPr/>
+                </a:tc>
+              </a:tr>
+              <a:tr h="292608">
+                <a:tc>
+                  <a:txBody>
+                    <a:bodyPr/>
+                    <a:lstStyle/>
+                    <a:p>
+                      <a:r>
+                        <a:rPr sz="1300" b="0">
+                          <a:solidFill>
+                            <a:srgbClr val="1A1A1A"/>
+                          </a:solidFill>
+                          <a:latin typeface="Calibri"/>
+                        </a:rPr>
+                        <a:t>RAG dense</a:t>
+                      </a:r>
+                    </a:p>
+                  </a:txBody>
+                  <a:tcPr/>
+                </a:tc>
+                <a:tc>
+                  <a:txBody>
+                    <a:bodyPr/>
+                    <a:lstStyle/>
+                    <a:p>
+                      <a:r>
+                        <a:rPr sz="1300" b="0">
+                          <a:solidFill>
+                            <a:srgbClr val="1A1A1A"/>
+                          </a:solidFill>
+                          <a:latin typeface="Calibri"/>
+                        </a:rPr>
+                        <a:t>0.207</a:t>
+                      </a:r>
+                    </a:p>
+                  </a:txBody>
+                  <a:tcPr/>
+                </a:tc>
+                <a:tc>
+                  <a:txBody>
+                    <a:bodyPr/>
+                    <a:lstStyle/>
+                    <a:p>
+                      <a:r>
+                        <a:rPr sz="1300" b="0">
+                          <a:solidFill>
+                            <a:srgbClr val="1A1A1A"/>
+                          </a:solidFill>
+                          <a:latin typeface="Calibri"/>
+                        </a:rPr>
+                        <a:t>0.417</a:t>
+                      </a:r>
+                    </a:p>
+                  </a:txBody>
+                  <a:tcPr/>
+                </a:tc>
+                <a:tc>
+                  <a:txBody>
+                    <a:bodyPr/>
+                    <a:lstStyle/>
+                    <a:p>
+                      <a:r>
+                        <a:rPr sz="1300" b="0">
+                          <a:solidFill>
+                            <a:srgbClr val="1A1A1A"/>
+                          </a:solidFill>
+                          <a:latin typeface="Calibri"/>
+                        </a:rPr>
+                        <a:t>0.762</a:t>
+                      </a:r>
+                    </a:p>
+                  </a:txBody>
+                  <a:tcPr/>
+                </a:tc>
+              </a:tr>
+              <a:tr h="292608">
+                <a:tc>
+                  <a:txBody>
+                    <a:bodyPr/>
+                    <a:lstStyle/>
+                    <a:p>
+                      <a:r>
+                        <a:rPr sz="1300" b="0">
+                          <a:solidFill>
+                            <a:srgbClr val="1A1A1A"/>
+                          </a:solidFill>
+                          <a:latin typeface="Calibri"/>
+                        </a:rPr>
+                        <a:t>RAG hybrid</a:t>
+                      </a:r>
+                    </a:p>
+                  </a:txBody>
+                  <a:tcPr/>
+                </a:tc>
+                <a:tc>
+                  <a:txBody>
+                    <a:bodyPr/>
+                    <a:lstStyle/>
+                    <a:p>
+                      <a:r>
+                        <a:rPr sz="1300" b="0">
+                          <a:solidFill>
+                            <a:srgbClr val="1A1A1A"/>
+                          </a:solidFill>
+                          <a:latin typeface="Calibri"/>
+                        </a:rPr>
+                        <a:t>0.210</a:t>
+                      </a:r>
+                    </a:p>
+                  </a:txBody>
+                  <a:tcPr/>
+                </a:tc>
+                <a:tc>
+                  <a:txBody>
+                    <a:bodyPr/>
+                    <a:lstStyle/>
+                    <a:p>
+                      <a:r>
+                        <a:rPr sz="1300" b="0">
+                          <a:solidFill>
+                            <a:srgbClr val="1A1A1A"/>
+                          </a:solidFill>
+                          <a:latin typeface="Calibri"/>
+                        </a:rPr>
+                        <a:t>0.361</a:t>
+                      </a:r>
+                    </a:p>
+                  </a:txBody>
+                  <a:tcPr/>
+                </a:tc>
+                <a:tc>
+                  <a:txBody>
+                    <a:bodyPr/>
+                    <a:lstStyle/>
+                    <a:p>
+                      <a:r>
+                        <a:rPr sz="1300" b="0">
+                          <a:solidFill>
+                            <a:srgbClr val="1A1A1A"/>
+                          </a:solidFill>
+                          <a:latin typeface="Calibri"/>
+                        </a:rPr>
+                        <a:t>0.826</a:t>
+                      </a:r>
+                    </a:p>
+                  </a:txBody>
+                  <a:tcPr/>
+                </a:tc>
+              </a:tr>
+              <a:tr h="292608">
+                <a:tc>
+                  <a:txBody>
+                    <a:bodyPr/>
+                    <a:lstStyle/>
+                    <a:p>
+                      <a:r>
+                        <a:rPr sz="1300" b="0">
+                          <a:solidFill>
+                            <a:srgbClr val="1A1A1A"/>
+                          </a:solidFill>
+                          <a:latin typeface="Calibri"/>
+                        </a:rPr>
+                        <a:t>oracle</a:t>
+                      </a:r>
+                    </a:p>
+                  </a:txBody>
+                  <a:tcPr/>
+                </a:tc>
+                <a:tc>
+                  <a:txBody>
+                    <a:bodyPr/>
+                    <a:lstStyle/>
+                    <a:p>
+                      <a:r>
+                        <a:rPr sz="1300" b="0">
+                          <a:solidFill>
+                            <a:srgbClr val="1A1A1A"/>
+                          </a:solidFill>
+                          <a:latin typeface="Calibri"/>
+                        </a:rPr>
+                        <a:t>0.403</a:t>
+                      </a:r>
+                    </a:p>
+                  </a:txBody>
+                  <a:tcPr/>
+                </a:tc>
+                <a:tc>
+                  <a:txBody>
+                    <a:bodyPr/>
+                    <a:lstStyle/>
+                    <a:p>
+                      <a:r>
+                        <a:rPr sz="1300" b="0">
+                          <a:solidFill>
+                            <a:srgbClr val="1A1A1A"/>
+                          </a:solidFill>
+                          <a:latin typeface="Calibri"/>
+                        </a:rPr>
+                        <a:t>0.194</a:t>
+                      </a:r>
+                    </a:p>
+                  </a:txBody>
+                  <a:tcPr/>
+                </a:tc>
+                <a:tc>
+                  <a:txBody>
+                    <a:bodyPr/>
+                    <a:lstStyle/>
+                    <a:p>
+                      <a:r>
+                        <a:rPr sz="1300" b="0">
+                          <a:solidFill>
+                            <a:srgbClr val="1A1A1A"/>
+                          </a:solidFill>
+                          <a:latin typeface="Calibri"/>
+                        </a:rPr>
+                        <a:t>0.948</a:t>
+                      </a:r>
+                    </a:p>
+                  </a:txBody>
+                  <a:tcPr/>
+                </a:tc>
+              </a:tr>
+            </a:tbl>
+          </a:graphicData>
+        </a:graphic>
+      </p:graphicFrame>
+      <p:sp>
+        <p:nvSpPr>
+          <p:cNvPr id="5" name="TextBox 4"/>
           <p:cNvSpPr txBox="1"/>
           <p:nvPr/>
         </p:nvSpPr>
@@ -4987,6 +5511,550 @@
 </file>
 
 <file path=ppt/slides/slide12.xml><?xml version="1.0" encoding="utf-8"?>
+<p:sld xmlns:a="http://schemas.openxmlformats.org/drawingml/2006/main" xmlns:p="http://schemas.openxmlformats.org/presentationml/2006/main" xmlns:r="http://schemas.openxmlformats.org/officeDocument/2006/relationships">
+  <p:cSld>
+    <p:spTree>
+      <p:nvGrpSpPr>
+        <p:cNvPr id="1" name=""/>
+        <p:cNvGrpSpPr/>
+        <p:nvPr/>
+      </p:nvGrpSpPr>
+      <p:grpSpPr/>
+      <p:sp>
+        <p:nvSpPr>
+          <p:cNvPr id="2" name="TextBox 1"/>
+          <p:cNvSpPr txBox="1"/>
+          <p:nvPr/>
+        </p:nvSpPr>
+        <p:spPr>
+          <a:xfrm>
+            <a:off x="640080" y="457200"/>
+            <a:ext cx="10972800" cy="914400"/>
+          </a:xfrm>
+          <a:prstGeom prst="rect">
+            <a:avLst/>
+          </a:prstGeom>
+          <a:noFill/>
+        </p:spPr>
+        <p:txBody>
+          <a:bodyPr wrap="square">
+            <a:spAutoFit/>
+          </a:bodyPr>
+          <a:lstStyle/>
+          <a:p>
+            <a:pPr>
+              <a:spcAft>
+                <a:spcPts val="600"/>
+              </a:spcAft>
+            </a:pPr>
+            <a:r>
+              <a:rPr sz="2800" b="1">
+                <a:solidFill>
+                  <a:srgbClr val="1A1A1A"/>
+                </a:solidFill>
+                <a:latin typeface="Calibri"/>
+              </a:rPr>
+              <a:t>But retrieval is not the bottleneck</a:t>
+            </a:r>
+          </a:p>
+        </p:txBody>
+      </p:sp>
+      <p:sp>
+        <p:nvSpPr>
+          <p:cNvPr id="3" name="TextBox 2"/>
+          <p:cNvSpPr txBox="1"/>
+          <p:nvPr/>
+        </p:nvSpPr>
+        <p:spPr>
+          <a:xfrm>
+            <a:off x="640080" y="1463040"/>
+            <a:ext cx="10972800" cy="3108960"/>
+          </a:xfrm>
+          <a:prstGeom prst="rect">
+            <a:avLst/>
+          </a:prstGeom>
+          <a:noFill/>
+        </p:spPr>
+        <p:txBody>
+          <a:bodyPr wrap="square">
+            <a:spAutoFit/>
+          </a:bodyPr>
+          <a:lstStyle/>
+          <a:p>
+            <a:pPr>
+              <a:spcAft>
+                <a:spcPts val="600"/>
+              </a:spcAft>
+            </a:pPr>
+            <a:r>
+              <a:rPr sz="1800" b="0">
+                <a:solidFill>
+                  <a:srgbClr val="1A1A1A"/>
+                </a:solidFill>
+                <a:latin typeface="Calibri"/>
+              </a:rPr>
+              <a:t>Fixing retrieval entirely buys 0.193. The 3B generator is losing 0.597.</a:t>
+            </a:r>
+          </a:p>
+          <a:p>
+            <a:pPr>
+              <a:spcAft>
+                <a:spcPts val="600"/>
+              </a:spcAft>
+            </a:pPr>
+            <a:r>
+              <a:rPr sz="1800" b="0">
+                <a:solidFill>
+                  <a:srgbClr val="1A1A1A"/>
+                </a:solidFill>
+                <a:latin typeface="Calibri"/>
+              </a:rPr>
+              <a:t>Say this out loud: our own contribution improves the smaller of the two.</a:t>
+            </a:r>
+          </a:p>
+        </p:txBody>
+      </p:sp>
+      <p:graphicFrame>
+        <p:nvGraphicFramePr>
+          <p:cNvPr id="4" name="Table 3"/>
+          <p:cNvGraphicFramePr>
+            <a:graphicFrameLocks noGrp="1"/>
+          </p:cNvGraphicFramePr>
+          <p:nvPr/>
+        </p:nvGraphicFramePr>
+        <p:xfrm>
+          <a:off x="640080" y="2231136"/>
+          <a:ext cx="10058400" cy="1170432"/>
+        </p:xfrm>
+        <a:graphic>
+          <a:graphicData uri="http://schemas.openxmlformats.org/drawingml/2006/table">
+            <a:tbl>
+              <a:tblPr firstRow="1" bandRow="1">
+                <a:tableStyleId>{5C22544A-7EE6-4342-B048-85BDC9FD1C3A}</a:tableStyleId>
+              </a:tblPr>
+              <a:tblGrid>
+                <a:gridCol w="5029200"/>
+                <a:gridCol w="5029200"/>
+              </a:tblGrid>
+              <a:tr h="292608">
+                <a:tc>
+                  <a:txBody>
+                    <a:bodyPr/>
+                    <a:lstStyle/>
+                    <a:p>
+                      <a:r>
+                        <a:rPr sz="1300" b="1">
+                          <a:solidFill>
+                            <a:srgbClr val="1A1A1A"/>
+                          </a:solidFill>
+                          <a:latin typeface="Calibri"/>
+                        </a:rPr>
+                        <a:t>oracle token-F1</a:t>
+                      </a:r>
+                    </a:p>
+                  </a:txBody>
+                  <a:tcPr/>
+                </a:tc>
+                <a:tc>
+                  <a:txBody>
+                    <a:bodyPr/>
+                    <a:lstStyle/>
+                    <a:p>
+                      <a:r>
+                        <a:rPr sz="1300" b="1">
+                          <a:solidFill>
+                            <a:srgbClr val="1A1A1A"/>
+                          </a:solidFill>
+                          <a:latin typeface="Calibri"/>
+                        </a:rPr>
+                        <a:t>0.403</a:t>
+                      </a:r>
+                    </a:p>
+                  </a:txBody>
+                  <a:tcPr/>
+                </a:tc>
+              </a:tr>
+              <a:tr h="292608">
+                <a:tc>
+                  <a:txBody>
+                    <a:bodyPr/>
+                    <a:lstStyle/>
+                    <a:p>
+                      <a:r>
+                        <a:rPr sz="1300" b="0">
+                          <a:solidFill>
+                            <a:srgbClr val="1A1A1A"/>
+                          </a:solidFill>
+                          <a:latin typeface="Calibri"/>
+                        </a:rPr>
+                        <a:t>full system token-F1</a:t>
+                      </a:r>
+                    </a:p>
+                  </a:txBody>
+                  <a:tcPr/>
+                </a:tc>
+                <a:tc>
+                  <a:txBody>
+                    <a:bodyPr/>
+                    <a:lstStyle/>
+                    <a:p>
+                      <a:r>
+                        <a:rPr sz="1300" b="0">
+                          <a:solidFill>
+                            <a:srgbClr val="1A1A1A"/>
+                          </a:solidFill>
+                          <a:latin typeface="Calibri"/>
+                        </a:rPr>
+                        <a:t>0.210</a:t>
+                      </a:r>
+                    </a:p>
+                  </a:txBody>
+                  <a:tcPr/>
+                </a:tc>
+              </a:tr>
+              <a:tr h="292608">
+                <a:tc>
+                  <a:txBody>
+                    <a:bodyPr/>
+                    <a:lstStyle/>
+                    <a:p>
+                      <a:r>
+                        <a:rPr sz="1300" b="0">
+                          <a:solidFill>
+                            <a:srgbClr val="1A1A1A"/>
+                          </a:solidFill>
+                          <a:latin typeface="Calibri"/>
+                        </a:rPr>
+                        <a:t>retrieval error</a:t>
+                      </a:r>
+                    </a:p>
+                  </a:txBody>
+                  <a:tcPr/>
+                </a:tc>
+                <a:tc>
+                  <a:txBody>
+                    <a:bodyPr/>
+                    <a:lstStyle/>
+                    <a:p>
+                      <a:r>
+                        <a:rPr sz="1300" b="0">
+                          <a:solidFill>
+                            <a:srgbClr val="1A1A1A"/>
+                          </a:solidFill>
+                          <a:latin typeface="Calibri"/>
+                        </a:rPr>
+                        <a:t>0.193</a:t>
+                      </a:r>
+                    </a:p>
+                  </a:txBody>
+                  <a:tcPr/>
+                </a:tc>
+              </a:tr>
+              <a:tr h="292608">
+                <a:tc>
+                  <a:txBody>
+                    <a:bodyPr/>
+                    <a:lstStyle/>
+                    <a:p>
+                      <a:r>
+                        <a:rPr sz="1300" b="0">
+                          <a:solidFill>
+                            <a:srgbClr val="1A1A1A"/>
+                          </a:solidFill>
+                          <a:latin typeface="Calibri"/>
+                        </a:rPr>
+                        <a:t>generation error</a:t>
+                      </a:r>
+                    </a:p>
+                  </a:txBody>
+                  <a:tcPr/>
+                </a:tc>
+                <a:tc>
+                  <a:txBody>
+                    <a:bodyPr/>
+                    <a:lstStyle/>
+                    <a:p>
+                      <a:r>
+                        <a:rPr sz="1300" b="0">
+                          <a:solidFill>
+                            <a:srgbClr val="1A1A1A"/>
+                          </a:solidFill>
+                          <a:latin typeface="Calibri"/>
+                        </a:rPr>
+                        <a:t>0.597</a:t>
+                      </a:r>
+                    </a:p>
+                  </a:txBody>
+                  <a:tcPr/>
+                </a:tc>
+              </a:tr>
+            </a:tbl>
+          </a:graphicData>
+        </a:graphic>
+      </p:graphicFrame>
+      <p:sp>
+        <p:nvSpPr>
+          <p:cNvPr id="5" name="TextBox 4"/>
+          <p:cNvSpPr txBox="1"/>
+          <p:nvPr/>
+        </p:nvSpPr>
+        <p:spPr>
+          <a:xfrm>
+            <a:off x="11247120" y="6309360"/>
+            <a:ext cx="640080" cy="320040"/>
+          </a:xfrm>
+          <a:prstGeom prst="rect">
+            <a:avLst/>
+          </a:prstGeom>
+          <a:noFill/>
+        </p:spPr>
+        <p:txBody>
+          <a:bodyPr wrap="square">
+            <a:spAutoFit/>
+          </a:bodyPr>
+          <a:lstStyle/>
+          <a:p>
+            <a:pPr>
+              <a:spcAft>
+                <a:spcPts val="600"/>
+              </a:spcAft>
+            </a:pPr>
+            <a:r>
+              <a:rPr sz="1100" b="0">
+                <a:solidFill>
+                  <a:srgbClr val="5A5A5A"/>
+                </a:solidFill>
+                <a:latin typeface="Calibri"/>
+              </a:rPr>
+              <a:t>12</a:t>
+            </a:r>
+          </a:p>
+        </p:txBody>
+      </p:sp>
+    </p:spTree>
+  </p:cSld>
+  <p:clrMapOvr>
+    <a:masterClrMapping/>
+  </p:clrMapOvr>
+</p:sld>
+</file>
+
+<file path=ppt/slides/slide13.xml><?xml version="1.0" encoding="utf-8"?>
+<p:sld xmlns:a="http://schemas.openxmlformats.org/drawingml/2006/main" xmlns:p="http://schemas.openxmlformats.org/presentationml/2006/main" xmlns:r="http://schemas.openxmlformats.org/officeDocument/2006/relationships">
+  <p:cSld>
+    <p:spTree>
+      <p:nvGrpSpPr>
+        <p:cNvPr id="1" name=""/>
+        <p:cNvGrpSpPr/>
+        <p:nvPr/>
+      </p:nvGrpSpPr>
+      <p:grpSpPr/>
+      <p:sp>
+        <p:nvSpPr>
+          <p:cNvPr id="2" name="TextBox 1"/>
+          <p:cNvSpPr txBox="1"/>
+          <p:nvPr/>
+        </p:nvSpPr>
+        <p:spPr>
+          <a:xfrm>
+            <a:off x="640080" y="457200"/>
+            <a:ext cx="10972800" cy="914400"/>
+          </a:xfrm>
+          <a:prstGeom prst="rect">
+            <a:avLst/>
+          </a:prstGeom>
+          <a:noFill/>
+        </p:spPr>
+        <p:txBody>
+          <a:bodyPr wrap="square">
+            <a:spAutoFit/>
+          </a:bodyPr>
+          <a:lstStyle/>
+          <a:p>
+            <a:pPr>
+              <a:spcAft>
+                <a:spcPts val="600"/>
+              </a:spcAft>
+            </a:pPr>
+            <a:r>
+              <a:rPr sz="2800" b="1">
+                <a:solidFill>
+                  <a:srgbClr val="1A1A1A"/>
+                </a:solidFill>
+                <a:latin typeface="Calibri"/>
+              </a:rPr>
+              <a:t>Where this generalises</a:t>
+            </a:r>
+          </a:p>
+        </p:txBody>
+      </p:sp>
+      <p:sp>
+        <p:nvSpPr>
+          <p:cNvPr id="3" name="TextBox 2"/>
+          <p:cNvSpPr txBox="1"/>
+          <p:nvPr/>
+        </p:nvSpPr>
+        <p:spPr>
+          <a:xfrm>
+            <a:off x="640080" y="1463040"/>
+            <a:ext cx="10972800" cy="3108960"/>
+          </a:xfrm>
+          <a:prstGeom prst="rect">
+            <a:avLst/>
+          </a:prstGeom>
+          <a:noFill/>
+        </p:spPr>
+        <p:txBody>
+          <a:bodyPr wrap="square">
+            <a:spAutoFit/>
+          </a:bodyPr>
+          <a:lstStyle/>
+          <a:p>
+            <a:pPr>
+              <a:spcAft>
+                <a:spcPts val="600"/>
+              </a:spcAft>
+            </a:pPr>
+            <a:r>
+              <a:rPr sz="1800" b="0">
+                <a:solidFill>
+                  <a:srgbClr val="1A1A1A"/>
+                </a:solidFill>
+                <a:latin typeface="Calibri"/>
+              </a:rPr>
+              <a:t>Not about Hindi. Not about script.</a:t>
+            </a:r>
+          </a:p>
+          <a:p>
+            <a:pPr>
+              <a:spcAft>
+                <a:spcPts val="600"/>
+              </a:spcAft>
+            </a:pPr>
+            <a:r>
+              <a:rPr sz="1800" b="0">
+                <a:solidFill>
+                  <a:srgbClr val="1A1A1A"/>
+                </a:solidFill>
+                <a:latin typeface="Calibri"/>
+              </a:rPr>
+              <a:t>Anywhere rank fusion runs over retrievers with asymmetric coverage:</a:t>
+            </a:r>
+          </a:p>
+          <a:p>
+            <a:pPr>
+              <a:spcAft>
+                <a:spcPts val="600"/>
+              </a:spcAft>
+            </a:pPr>
+            <a:r>
+              <a:rPr sz="1800" b="0">
+                <a:solidFill>
+                  <a:srgbClr val="1A1A1A"/>
+                </a:solidFill>
+                <a:latin typeface="Calibri"/>
+              </a:rPr>
+              <a:t>- text × image/table retrieval — each blind to the other's modality</a:t>
+            </a:r>
+          </a:p>
+          <a:p>
+            <a:pPr>
+              <a:spcAft>
+                <a:spcPts val="600"/>
+              </a:spcAft>
+            </a:pPr>
+            <a:r>
+              <a:rPr sz="1800" b="0">
+                <a:solidFill>
+                  <a:srgbClr val="1A1A1A"/>
+                </a:solidFill>
+                <a:latin typeface="Calibri"/>
+              </a:rPr>
+              <a:t>- access-controlled shards — one retriever permitted a subset</a:t>
+            </a:r>
+          </a:p>
+          <a:p>
+            <a:pPr>
+              <a:spcAft>
+                <a:spcPts val="600"/>
+              </a:spcAft>
+            </a:pPr>
+            <a:r>
+              <a:rPr sz="1800" b="0">
+                <a:solidFill>
+                  <a:srgbClr val="1A1A1A"/>
+                </a:solidFill>
+                <a:latin typeface="Calibri"/>
+              </a:rPr>
+              <a:t>- specialist × general index over partly-covered collections</a:t>
+            </a:r>
+          </a:p>
+          <a:p>
+            <a:pPr>
+              <a:spcAft>
+                <a:spcPts val="600"/>
+              </a:spcAft>
+            </a:pPr>
+            <a:r>
+              <a:rPr sz="1800" b="0">
+                <a:solidFill>
+                  <a:srgbClr val="1A1A1A"/>
+                </a:solidFill>
+                <a:latin typeface="Calibri"/>
+              </a:rPr>
+              <a:t>Guidance: before fusing, check retriever coverage, not only quality.</a:t>
+            </a:r>
+          </a:p>
+        </p:txBody>
+      </p:sp>
+      <p:sp>
+        <p:nvSpPr>
+          <p:cNvPr id="4" name="TextBox 3"/>
+          <p:cNvSpPr txBox="1"/>
+          <p:nvPr/>
+        </p:nvSpPr>
+        <p:spPr>
+          <a:xfrm>
+            <a:off x="11247120" y="6309360"/>
+            <a:ext cx="640080" cy="320040"/>
+          </a:xfrm>
+          <a:prstGeom prst="rect">
+            <a:avLst/>
+          </a:prstGeom>
+          <a:noFill/>
+        </p:spPr>
+        <p:txBody>
+          <a:bodyPr wrap="square">
+            <a:spAutoFit/>
+          </a:bodyPr>
+          <a:lstStyle/>
+          <a:p>
+            <a:pPr>
+              <a:spcAft>
+                <a:spcPts val="600"/>
+              </a:spcAft>
+            </a:pPr>
+            <a:r>
+              <a:rPr sz="1100" b="0">
+                <a:solidFill>
+                  <a:srgbClr val="5A5A5A"/>
+                </a:solidFill>
+                <a:latin typeface="Calibri"/>
+              </a:rPr>
+              <a:t>13</a:t>
+            </a:r>
+          </a:p>
+        </p:txBody>
+      </p:sp>
+    </p:spTree>
+  </p:cSld>
+  <p:clrMapOvr>
+    <a:masterClrMapping/>
+  </p:clrMapOvr>
+</p:sld>
+</file>
+
+<file path=ppt/slides/slide14.xml><?xml version="1.0" encoding="utf-8"?>
 <p:sld xmlns:a="http://schemas.openxmlformats.org/drawingml/2006/main" xmlns:p="http://schemas.openxmlformats.org/presentationml/2006/main" xmlns:r="http://schemas.openxmlformats.org/officeDocument/2006/relationships">
   <p:cSld>
     <p:spTree>
@@ -5429,7 +6497,7 @@
                 </a:solidFill>
                 <a:latin typeface="Calibri"/>
               </a:rPr>
-              <a:t>12</a:t>
+              <a:t>14</a:t>
             </a:r>
           </a:p>
         </p:txBody>
@@ -5442,7 +6510,7 @@
 </p:sld>
 </file>
 
-<file path=ppt/slides/slide13.xml><?xml version="1.0" encoding="utf-8"?>
+<file path=ppt/slides/slide15.xml><?xml version="1.0" encoding="utf-8"?>
 <p:sld xmlns:a="http://schemas.openxmlformats.org/drawingml/2006/main" xmlns:p="http://schemas.openxmlformats.org/presentationml/2006/main" xmlns:r="http://schemas.openxmlformats.org/officeDocument/2006/relationships">
   <p:cSld>
     <p:spTree>
@@ -5628,7 +6696,7 @@
                 </a:solidFill>
                 <a:latin typeface="Calibri"/>
               </a:rPr>
-              <a:t>13</a:t>
+              <a:t>15</a:t>
             </a:r>
           </a:p>
         </p:txBody>
@@ -5641,7 +6709,7 @@
 </p:sld>
 </file>
 
-<file path=ppt/slides/slide14.xml><?xml version="1.0" encoding="utf-8"?>
+<file path=ppt/slides/slide16.xml><?xml version="1.0" encoding="utf-8"?>
 <p:sld xmlns:a="http://schemas.openxmlformats.org/drawingml/2006/main" xmlns:p="http://schemas.openxmlformats.org/presentationml/2006/main" xmlns:r="http://schemas.openxmlformats.org/officeDocument/2006/relationships">
   <p:cSld>
     <p:spTree>
@@ -5827,7 +6895,7 @@
                 </a:solidFill>
                 <a:latin typeface="Calibri"/>
               </a:rPr>
-              <a:t>14</a:t>
+              <a:t>16</a:t>
             </a:r>
           </a:p>
         </p:txBody>

--- a/paper/IndicRAG-QA-slides.pptx
+++ b/paper/IndicRAG-QA-slides.pptx
@@ -657,7 +657,7 @@
           <a:lstStyle/>
           <a:p>
             <a:r>
-              <a:t>This is H3 and it is the cleanest result in the deck. The closed-book arm is not refusing — it is confidently reciting eligibility thresholds from memory and getting them wrong.</a:t>
+              <a:t>This is H3 and it is the cleanest result in the deck. The closed-book arm is not refusing — it is confidently reciting eligibility thresholds from memory and getting them wrong. Say the second line out loud: the unpaired rates (0.826 vs 0.762) look like a win only because the arms answer different numbers of questions. The paired test is what settles it.</a:t>
             </a:r>
           </a:p>
         </p:txBody>
@@ -5028,7 +5028,7 @@
                 </a:solidFill>
                 <a:latin typeface="Calibri"/>
               </a:rPr>
-              <a:t>by the evidence.</a:t>
+              <a:t>by the evidence. Paired: +0.593, p = 0.0001.</a:t>
             </a:r>
           </a:p>
           <a:p>
@@ -5044,7 +5044,7 @@
                 </a:solidFill>
                 <a:latin typeface="Calibri"/>
               </a:rPr>
-              <a:t>Script-aware fusion propagates: hybrid beats dense on support and abstains</a:t>
+              <a:t>Hybrid vs dense is NOT significant (+0.026, p = 1.00). Retrieval-or-not is</a:t>
             </a:r>
           </a:p>
           <a:p>
@@ -5060,7 +5060,7 @@
                 </a:solidFill>
                 <a:latin typeface="Calibri"/>
               </a:rPr>
-              <a:t>less, same model, same questions.</a:t>
+              <a:t>the large effect; which retriever does not show up downstream at n = 72.</a:t>
             </a:r>
           </a:p>
         </p:txBody>

--- a/paper/IndicRAG-QA-slides.pptx
+++ b/paper/IndicRAG-QA-slides.pptx
@@ -867,7 +867,7 @@
           <a:lstStyle/>
           <a:p>
             <a:r>
-              <a:t>A property of the signal, not the calibration. The fitted operating point swings from 0.000 recall to 0.93 depending only on the split, while the curve underneath stays flat — which is why the separation table matters more than any single number. Motivates the NLI signal.</a:t>
+              <a:t>The calibrated row is the one to dwell on — perfect recall, achieved by refusing every single question. Per-class recall of 1.000 everywhere means nothing when the system abstains unconditionally. Only the generator, which reads the passage, produces a system that answers anything. Adding NLI on top changes nothing: it had 2 false positives left to catch.</a:t>
             </a:r>
           </a:p>
         </p:txBody>
@@ -6220,6 +6220,22 @@
               <a:t>absence.</a:t>
             </a:r>
           </a:p>
+          <a:p>
+            <a:pPr>
+              <a:spcAft>
+                <a:spcPts val="600"/>
+              </a:spcAft>
+            </a:pPr>
+            <a:r>
+              <a:rPr sz="1800" b="0">
+                <a:solidFill>
+                  <a:srgbClr val="1A1A1A"/>
+                </a:solidFill>
+                <a:latin typeface="Calibri"/>
+              </a:rPr>
+              <a:t>Four signals, same items. Of 28 answerable questions, how many get answered?</a:t>
+            </a:r>
+          </a:p>
         </p:txBody>
       </p:sp>
       <p:graphicFrame>
@@ -6231,8 +6247,8 @@
           <p:nvPr/>
         </p:nvGraphicFramePr>
         <p:xfrm>
-          <a:off x="640080" y="3767328"/>
-          <a:ext cx="10058400" cy="1170432"/>
+          <a:off x="640080" y="4151376"/>
+          <a:ext cx="10058400" cy="2340864"/>
         </p:xfrm>
         <a:graphic>
           <a:graphicData uri="http://schemas.openxmlformats.org/drawingml/2006/table">
@@ -6453,6 +6469,230 @@
                           <a:latin typeface="Calibri"/>
                         </a:rPr>
                         <a:t>0.0325</a:t>
+                      </a:r>
+                    </a:p>
+                  </a:txBody>
+                  <a:tcPr/>
+                </a:tc>
+              </a:tr>
+              <a:tr h="292608">
+                <a:tc>
+                  <a:txBody>
+                    <a:bodyPr/>
+                    <a:lstStyle/>
+                    <a:p>
+                      <a:r>
+                        <a:rPr sz="1300" b="0">
+                          <a:solidFill>
+                            <a:srgbClr val="1A1A1A"/>
+                          </a:solidFill>
+                          <a:latin typeface="Calibri"/>
+                        </a:rPr>
+                        <a:t>signal</a:t>
+                      </a:r>
+                    </a:p>
+                  </a:txBody>
+                  <a:tcPr/>
+                </a:tc>
+                <a:tc>
+                  <a:txBody>
+                    <a:bodyPr/>
+                    <a:lstStyle/>
+                    <a:p>
+                      <a:r>
+                        <a:rPr sz="1300" b="0">
+                          <a:solidFill>
+                            <a:srgbClr val="1A1A1A"/>
+                          </a:solidFill>
+                          <a:latin typeface="Calibri"/>
+                        </a:rPr>
+                        <a:t>catches unanswerable</a:t>
+                      </a:r>
+                    </a:p>
+                  </a:txBody>
+                  <a:tcPr/>
+                </a:tc>
+                <a:tc>
+                  <a:txBody>
+                    <a:bodyPr/>
+                    <a:lstStyle/>
+                    <a:p>
+                      <a:r>
+                        <a:rPr sz="1300" b="0">
+                          <a:solidFill>
+                            <a:srgbClr val="1A1A1A"/>
+                          </a:solidFill>
+                          <a:latin typeface="Calibri"/>
+                        </a:rPr>
+                        <a:t>answers answerable</a:t>
+                      </a:r>
+                    </a:p>
+                  </a:txBody>
+                  <a:tcPr/>
+                </a:tc>
+              </a:tr>
+              <a:tr h="292608">
+                <a:tc>
+                  <a:txBody>
+                    <a:bodyPr/>
+                    <a:lstStyle/>
+                    <a:p>
+                      <a:r>
+                        <a:rPr sz="1300" b="0">
+                          <a:solidFill>
+                            <a:srgbClr val="1A1A1A"/>
+                          </a:solidFill>
+                          <a:latin typeface="Calibri"/>
+                        </a:rPr>
+                        <a:t>retrieval threshold</a:t>
+                      </a:r>
+                    </a:p>
+                  </a:txBody>
+                  <a:tcPr/>
+                </a:tc>
+                <a:tc>
+                  <a:txBody>
+                    <a:bodyPr/>
+                    <a:lstStyle/>
+                    <a:p>
+                      <a:r>
+                        <a:rPr sz="1300" b="0">
+                          <a:solidFill>
+                            <a:srgbClr val="1A1A1A"/>
+                          </a:solidFill>
+                          <a:latin typeface="Calibri"/>
+                        </a:rPr>
+                        <a:t>53/56</a:t>
+                      </a:r>
+                    </a:p>
+                  </a:txBody>
+                  <a:tcPr/>
+                </a:tc>
+                <a:tc>
+                  <a:txBody>
+                    <a:bodyPr/>
+                    <a:lstStyle/>
+                    <a:p>
+                      <a:r>
+                        <a:rPr sz="1300" b="0">
+                          <a:solidFill>
+                            <a:srgbClr val="1A1A1A"/>
+                          </a:solidFill>
+                          <a:latin typeface="Calibri"/>
+                        </a:rPr>
+                        <a:t>6/28</a:t>
+                      </a:r>
+                    </a:p>
+                  </a:txBody>
+                  <a:tcPr/>
+                </a:tc>
+              </a:tr>
+              <a:tr h="292608">
+                <a:tc>
+                  <a:txBody>
+                    <a:bodyPr/>
+                    <a:lstStyle/>
+                    <a:p>
+                      <a:r>
+                        <a:rPr sz="1300" b="0">
+                          <a:solidFill>
+                            <a:srgbClr val="1A1A1A"/>
+                          </a:solidFill>
+                          <a:latin typeface="Calibri"/>
+                        </a:rPr>
+                        <a:t>calibrated combination</a:t>
+                      </a:r>
+                    </a:p>
+                  </a:txBody>
+                  <a:tcPr/>
+                </a:tc>
+                <a:tc>
+                  <a:txBody>
+                    <a:bodyPr/>
+                    <a:lstStyle/>
+                    <a:p>
+                      <a:r>
+                        <a:rPr sz="1300" b="0">
+                          <a:solidFill>
+                            <a:srgbClr val="1A1A1A"/>
+                          </a:solidFill>
+                          <a:latin typeface="Calibri"/>
+                        </a:rPr>
+                        <a:t>56/56</a:t>
+                      </a:r>
+                    </a:p>
+                  </a:txBody>
+                  <a:tcPr/>
+                </a:tc>
+                <a:tc>
+                  <a:txBody>
+                    <a:bodyPr/>
+                    <a:lstStyle/>
+                    <a:p>
+                      <a:r>
+                        <a:rPr sz="1300" b="0">
+                          <a:solidFill>
+                            <a:srgbClr val="1A1A1A"/>
+                          </a:solidFill>
+                          <a:latin typeface="Calibri"/>
+                        </a:rPr>
+                        <a:t>0/28</a:t>
+                      </a:r>
+                    </a:p>
+                  </a:txBody>
+                  <a:tcPr/>
+                </a:tc>
+              </a:tr>
+              <a:tr h="292608">
+                <a:tc>
+                  <a:txBody>
+                    <a:bodyPr/>
+                    <a:lstStyle/>
+                    <a:p>
+                      <a:r>
+                        <a:rPr sz="1300" b="0">
+                          <a:solidFill>
+                            <a:srgbClr val="1A1A1A"/>
+                          </a:solidFill>
+                          <a:latin typeface="Calibri"/>
+                        </a:rPr>
+                        <a:t>generator self-report</a:t>
+                      </a:r>
+                    </a:p>
+                  </a:txBody>
+                  <a:tcPr/>
+                </a:tc>
+                <a:tc>
+                  <a:txBody>
+                    <a:bodyPr/>
+                    <a:lstStyle/>
+                    <a:p>
+                      <a:r>
+                        <a:rPr sz="1300" b="0">
+                          <a:solidFill>
+                            <a:srgbClr val="1A1A1A"/>
+                          </a:solidFill>
+                          <a:latin typeface="Calibri"/>
+                        </a:rPr>
+                        <a:t>52/56</a:t>
+                      </a:r>
+                    </a:p>
+                  </a:txBody>
+                  <a:tcPr/>
+                </a:tc>
+                <a:tc>
+                  <a:txBody>
+                    <a:bodyPr/>
+                    <a:lstStyle/>
+                    <a:p>
+                      <a:r>
+                        <a:rPr sz="1300" b="0">
+                          <a:solidFill>
+                            <a:srgbClr val="1A1A1A"/>
+                          </a:solidFill>
+                          <a:latin typeface="Calibri"/>
+                        </a:rPr>
+                        <a:t>17/28</a:t>
                       </a:r>
                     </a:p>
                   </a:txBody>

--- a/paper/IndicRAG-QA-slides.pptx
+++ b/paper/IndicRAG-QA-slides.pptx
@@ -1427,7 +1427,7 @@
           <a:lstStyle/>
           <a:p>
             <a:r>
-              <a:t>The α sweep found no interior weighting that beat either endpoint. It was right about the method and wrong about the hypothesis — α was never the problem.</a:t>
+              <a:t>The α sweep found no interior weighting significantly better than the better endpoint. It was right about the method and wrong about the hypothesis — α was never the problem.</a:t>
             </a:r>
           </a:p>
         </p:txBody>

--- a/paper/IndicRAG-QA-slides.pptx
+++ b/paper/IndicRAG-QA-slides.pptx
@@ -1497,7 +1497,7 @@
           <a:lstStyle/>
           <a:p>
             <a:r>
-              <a:t>Read the monolingual row out loud. It is a real cost — removing the double vote loses precision where agreement genuinely was evidence.</a:t>
+              <a:t>Two comparisons, two answers. The repair to plain fusion is large and costs nothing monolingually. The gain over a good dense retriever is small — say so before someone asks.</a:t>
             </a:r>
           </a:p>
         </p:txBody>
@@ -1567,7 +1567,7 @@
           <a:lstStyle/>
           <a:p>
             <a:r>
-              <a:t>This is the slide that earns trust. Aggregates that conceal both the win and the cost are the default failure of results sections.</a:t>
+              <a:t>This is the slide that earns trust. The probe numbers were not wrong about the mechanism, only about the magnitudes.</a:t>
             </a:r>
           </a:p>
         </p:txBody>
@@ -5012,6 +5012,22 @@
                 </a:solidFill>
                 <a:latin typeface="Calibri"/>
               </a:rPr>
+              <a:t>Unverified items, 72-item sample — re-run on the test split pending.</a:t>
+            </a:r>
+          </a:p>
+          <a:p>
+            <a:pPr>
+              <a:spcAft>
+                <a:spcPts val="600"/>
+              </a:spcAft>
+            </a:pPr>
+            <a:r>
+              <a:rPr sz="1800" b="0">
+                <a:solidFill>
+                  <a:srgbClr val="1A1A1A"/>
+                </a:solidFill>
+                <a:latin typeface="Calibri"/>
+              </a:rPr>
               <a:t>Closed-book answers 37 of 72 questions. 16% of those answers are supported</a:t>
             </a:r>
           </a:p>
@@ -5074,7 +5090,7 @@
           <p:nvPr/>
         </p:nvGraphicFramePr>
         <p:xfrm>
-          <a:off x="640080" y="3383280"/>
+          <a:off x="640080" y="3767328"/>
           <a:ext cx="10058400" cy="1463040"/>
         </p:xfrm>
         <a:graphic>
@@ -5593,6 +5609,22 @@
                 </a:solidFill>
                 <a:latin typeface="Calibri"/>
               </a:rPr>
+              <a:t>Unverified items, 72-item sample.</a:t>
+            </a:r>
+          </a:p>
+          <a:p>
+            <a:pPr>
+              <a:spcAft>
+                <a:spcPts val="600"/>
+              </a:spcAft>
+            </a:pPr>
+            <a:r>
+              <a:rPr sz="1800" b="0">
+                <a:solidFill>
+                  <a:srgbClr val="1A1A1A"/>
+                </a:solidFill>
+                <a:latin typeface="Calibri"/>
+              </a:rPr>
               <a:t>Fixing retrieval entirely buys 0.193. The 3B generator is losing 0.597.</a:t>
             </a:r>
           </a:p>
@@ -5623,7 +5655,7 @@
           <p:nvPr/>
         </p:nvGraphicFramePr>
         <p:xfrm>
-          <a:off x="640080" y="2231136"/>
+          <a:off x="640080" y="2615184"/>
           <a:ext cx="10058400" cy="1170432"/>
         </p:xfrm>
         <a:graphic>
@@ -6098,7 +6130,7 @@
                 </a:solidFill>
                 <a:latin typeface="Calibri"/>
               </a:rPr>
-              <a:t>A second negative result: answerability</a:t>
+              <a:t>Answerability: which score you threshold matters</a:t>
             </a:r>
           </a:p>
         </p:txBody>
@@ -6137,7 +6169,7 @@
                 </a:solidFill>
                 <a:latin typeface="Calibri"/>
               </a:rPr>
-              <a:t>Retrieval-score thresholds carry no information about answerability here.</a:t>
+              <a:t>Median top retrieval score, verified set:</a:t>
             </a:r>
           </a:p>
           <a:p>
@@ -6153,7 +6185,7 @@
                 </a:solidFill>
                 <a:latin typeface="Calibri"/>
               </a:rPr>
-              <a:t>Unanswerable questions score higher. Precision stays at the 0.20 base rate at</a:t>
+              <a:t>BM25 threshold on test: F1 0.525, all out-of-scope caught — but only</a:t>
             </a:r>
           </a:p>
           <a:p>
@@ -6169,7 +6201,7 @@
                 </a:solidFill>
                 <a:latin typeface="Calibri"/>
               </a:rPr>
-              <a:t>every threshold.</a:t>
+              <a:t>0.522 of near-miss questions. The fused RRF score carries almost nothing:</a:t>
             </a:r>
           </a:p>
           <a:p>
@@ -6185,7 +6217,7 @@
                 </a:solidFill>
                 <a:latin typeface="Calibri"/>
               </a:rPr>
-              <a:t>Why: 55 of 80 unanswerable items are about schemes that ARE in the corpus.</a:t>
+              <a:t>rank fusion discards the magnitudes.</a:t>
             </a:r>
           </a:p>
           <a:p>
@@ -6201,7 +6233,7 @@
                 </a:solidFill>
                 <a:latin typeface="Calibri"/>
               </a:rPr>
-              <a:t>A retrieval threshold detects corpus absence — and answerability is not corpus</a:t>
+              <a:t>Before verification the BM25 medians were reversed (13.55 vs 13.82): questions</a:t>
             </a:r>
           </a:p>
           <a:p>
@@ -6217,7 +6249,7 @@
                 </a:solidFill>
                 <a:latin typeface="Calibri"/>
               </a:rPr>
-              <a:t>absence.</a:t>
+              <a:t>that did not name their scheme retrieved weakly whether or not they were</a:t>
             </a:r>
           </a:p>
           <a:p>
@@ -6233,7 +6265,39 @@
                 </a:solidFill>
                 <a:latin typeface="Calibri"/>
               </a:rPr>
-              <a:t>Four signals, same items. Of 28 answerable questions, how many get answered?</a:t>
+              <a:t>answerable.</a:t>
+            </a:r>
+          </a:p>
+          <a:p>
+            <a:pPr>
+              <a:spcAft>
+                <a:spcPts val="600"/>
+              </a:spcAft>
+            </a:pPr>
+            <a:r>
+              <a:rPr sz="1800" b="0">
+                <a:solidFill>
+                  <a:srgbClr val="1A1A1A"/>
+                </a:solidFill>
+                <a:latin typeface="Calibri"/>
+              </a:rPr>
+              <a:t>Four signals, same items (unverified set, enriched sample). Of 28 answerable</a:t>
+            </a:r>
+          </a:p>
+          <a:p>
+            <a:pPr>
+              <a:spcAft>
+                <a:spcPts val="600"/>
+              </a:spcAft>
+            </a:pPr>
+            <a:r>
+              <a:rPr sz="1800" b="0">
+                <a:solidFill>
+                  <a:srgbClr val="1A1A1A"/>
+                </a:solidFill>
+                <a:latin typeface="Calibri"/>
+              </a:rPr>
+              <a:t>questions, how many get answered?</a:t>
             </a:r>
           </a:p>
         </p:txBody>
@@ -6247,7 +6311,7 @@
           <p:nvPr/>
         </p:nvGraphicFramePr>
         <p:xfrm>
-          <a:off x="640080" y="4151376"/>
+          <a:off x="640080" y="4919472"/>
           <a:ext cx="10058400" cy="2340864"/>
         </p:xfrm>
         <a:graphic>
@@ -6338,7 +6402,7 @@
                           </a:solidFill>
                           <a:latin typeface="Calibri"/>
                         </a:rPr>
-                        <a:t>13.55</a:t>
+                        <a:t>25.47</a:t>
                       </a:r>
                     </a:p>
                   </a:txBody>
@@ -6394,7 +6458,7 @@
                           </a:solidFill>
                           <a:latin typeface="Calibri"/>
                         </a:rPr>
-                        <a:t>0.1424</a:t>
+                        <a:t>0.238</a:t>
                       </a:r>
                     </a:p>
                   </a:txBody>
@@ -6412,7 +6476,7 @@
                           </a:solidFill>
                           <a:latin typeface="Calibri"/>
                         </a:rPr>
-                        <a:t>0.1485</a:t>
+                        <a:t>0.145</a:t>
                       </a:r>
                     </a:p>
                   </a:txBody>
@@ -6432,7 +6496,7 @@
                           </a:solidFill>
                           <a:latin typeface="Calibri"/>
                         </a:rPr>
-                        <a:t>RRF</a:t>
+                        <a:t>RRF (fused)</a:t>
                       </a:r>
                     </a:p>
                   </a:txBody>
@@ -6450,7 +6514,7 @@
                           </a:solidFill>
                           <a:latin typeface="Calibri"/>
                         </a:rPr>
-                        <a:t>0.0327</a:t>
+                        <a:t>0.0328</a:t>
                       </a:r>
                     </a:p>
                   </a:txBody>
@@ -6865,7 +6929,7 @@
                 </a:solidFill>
                 <a:latin typeface="Calibri"/>
               </a:rPr>
-              <a:t>- 400 items, single primary annotator, blind 15% second pass, κ gated at 0.70</a:t>
+              <a:t>- 393 items, verified by a model, not a person; blind second pass κ = 1.000</a:t>
             </a:r>
           </a:p>
           <a:p>
@@ -6881,7 +6945,23 @@
                 </a:solidFill>
                 <a:latin typeface="Calibri"/>
               </a:rPr>
-              <a:t>- Retrieval numbers are [PROBE] pending gold-set verification</a:t>
+              <a:t>is one model agreeing with itself, not the 0.70 inter-annotator gate</a:t>
+            </a:r>
+          </a:p>
+          <a:p>
+            <a:pPr>
+              <a:spcAft>
+                <a:spcPts val="600"/>
+              </a:spcAft>
+            </a:pPr>
+            <a:r>
+              <a:rPr sz="1800" b="0">
+                <a:solidFill>
+                  <a:srgbClr val="1A1A1A"/>
+                </a:solidFill>
+                <a:latin typeface="Calibri"/>
+              </a:rPr>
+              <a:t>- Probe-set numbers kept only where the mechanism was found; results are test split</a:t>
             </a:r>
           </a:p>
           <a:p>
@@ -7064,7 +7144,7 @@
                 </a:solidFill>
                 <a:latin typeface="Calibri"/>
               </a:rPr>
-              <a:t>Fix the arithmetic, not the model: 7× cross-lingual, 6× code-mixed, no</a:t>
+              <a:t>Fix the arithmetic, not the model: cross-lingual 0.274 → 0.685, no</a:t>
             </a:r>
           </a:p>
           <a:p>
@@ -7080,7 +7160,7 @@
                 </a:solidFill>
                 <a:latin typeface="Calibri"/>
               </a:rPr>
-              <a:t>training.</a:t>
+              <a:t>monolingual cost, no training — and no large gain over dense alone.</a:t>
             </a:r>
           </a:p>
           <a:p>
@@ -7854,7 +7934,7 @@
                 </a:solidFill>
                 <a:latin typeface="Calibri"/>
               </a:rPr>
-              <a:t>- 400-item QA set, query-language × evidence-language matrix, 6 cells</a:t>
+              <a:t>- 393-item QA set (313 answerable, 80 unanswerable in 4 classes),</a:t>
             </a:r>
           </a:p>
           <a:p>
@@ -7870,7 +7950,23 @@
                 </a:solidFill>
                 <a:latin typeface="Calibri"/>
               </a:rPr>
-              <a:t>- 80 unanswerable items across 4 classes</a:t>
+              <a:t>query-language × evidence-language matrix, 6 cells; sealed dev 120 / test 273</a:t>
+            </a:r>
+          </a:p>
+          <a:p>
+            <a:pPr>
+              <a:spcAft>
+                <a:spcPts val="600"/>
+              </a:spcAft>
+            </a:pPr>
+            <a:r>
+              <a:rPr sz="1800" b="0">
+                <a:solidFill>
+                  <a:srgbClr val="1A1A1A"/>
+                </a:solidFill>
+                <a:latin typeface="Calibri"/>
+              </a:rPr>
+              <a:t>- Verified by a language model, not a person — disclosed on every report</a:t>
             </a:r>
           </a:p>
           <a:p>
@@ -8252,7 +8348,7 @@
                 </a:solidFill>
                 <a:latin typeface="Calibri"/>
               </a:rPr>
-              <a:t>Recall@5, cross-lingual queries [PROBE]</a:t>
+              <a:t>Recall@5, cross-lingual queries (test split, n = 62)</a:t>
             </a:r>
           </a:p>
           <a:p>
@@ -8364,7 +8460,7 @@
                           </a:solidFill>
                           <a:latin typeface="Calibri"/>
                         </a:rPr>
-                        <a:t>0.125</a:t>
+                        <a:t>0.661</a:t>
                       </a:r>
                     </a:p>
                   </a:txBody>
@@ -8402,7 +8498,7 @@
                           </a:solidFill>
                           <a:latin typeface="Calibri"/>
                         </a:rPr>
-                        <a:t>0.022</a:t>
+                        <a:t>0.274</a:t>
                       </a:r>
                     </a:p>
                   </a:txBody>
@@ -8873,6 +8969,54 @@
               <a:t>- Query-time cost unchanged</a:t>
             </a:r>
           </a:p>
+          <a:p>
+            <a:pPr>
+              <a:spcAft>
+                <a:spcPts val="600"/>
+              </a:spcAft>
+            </a:pPr>
+            <a:r>
+              <a:rPr sz="1800" b="0">
+                <a:solidFill>
+                  <a:srgbClr val="1A1A1A"/>
+                </a:solidFill>
+                <a:latin typeface="Calibri"/>
+              </a:rPr>
+              <a:t>Test split, Recall@5:</a:t>
+            </a:r>
+          </a:p>
+          <a:p>
+            <a:pPr>
+              <a:spcAft>
+                <a:spcPts val="600"/>
+              </a:spcAft>
+            </a:pPr>
+            <a:r>
+              <a:rPr sz="1800" b="0">
+                <a:solidFill>
+                  <a:srgbClr val="1A1A1A"/>
+                </a:solidFill>
+                <a:latin typeface="Calibri"/>
+              </a:rPr>
+              <a:t>vs plain RRF: +0.411 cross-lingual, +0.132 overall (p = 0.0001).</a:t>
+            </a:r>
+          </a:p>
+          <a:p>
+            <a:pPr>
+              <a:spcAft>
+                <a:spcPts val="600"/>
+              </a:spcAft>
+            </a:pPr>
+            <a:r>
+              <a:rPr sz="1800" b="0">
+                <a:solidFill>
+                  <a:srgbClr val="1A1A1A"/>
+                </a:solidFill>
+                <a:latin typeface="Calibri"/>
+              </a:rPr>
+              <a:t>vs dense alone: +0.030 overall (p = 0.052); significant only code-mixed (+0.085, p = 0.004).</a:t>
+            </a:r>
+          </a:p>
         </p:txBody>
       </p:sp>
       <p:graphicFrame>
@@ -8884,7 +9028,7 @@
           <p:nvPr/>
         </p:nvGraphicFramePr>
         <p:xfrm>
-          <a:off x="640080" y="3383280"/>
+          <a:off x="640080" y="4535424"/>
           <a:ext cx="10058400" cy="1463040"/>
         </p:xfrm>
         <a:graphic>
@@ -8966,7 +9110,7 @@
                           </a:solidFill>
                           <a:latin typeface="Calibri"/>
                         </a:rPr>
-                        <a:t>p</a:t>
+                        <a:t>Dense alone</a:t>
                       </a:r>
                     </a:p>
                   </a:txBody>
@@ -9004,7 +9148,7 @@
                           </a:solidFill>
                           <a:latin typeface="Calibri"/>
                         </a:rPr>
-                        <a:t>0.022</a:t>
+                        <a:t>0.274</a:t>
                       </a:r>
                     </a:p>
                   </a:txBody>
@@ -9022,7 +9166,7 @@
                           </a:solidFill>
                           <a:latin typeface="Calibri"/>
                         </a:rPr>
-                        <a:t>0.153</a:t>
+                        <a:t>0.685</a:t>
                       </a:r>
                     </a:p>
                   </a:txBody>
@@ -9040,7 +9184,7 @@
                           </a:solidFill>
                           <a:latin typeface="Calibri"/>
                         </a:rPr>
-                        <a:t>0.0001</a:t>
+                        <a:t>0.661</a:t>
                       </a:r>
                     </a:p>
                   </a:txBody>
@@ -9078,7 +9222,7 @@
                           </a:solidFill>
                           <a:latin typeface="Calibri"/>
                         </a:rPr>
-                        <a:t>0.028</a:t>
+                        <a:t>0.514</a:t>
                       </a:r>
                     </a:p>
                   </a:txBody>
@@ -9096,7 +9240,7 @@
                           </a:solidFill>
                           <a:latin typeface="Calibri"/>
                         </a:rPr>
-                        <a:t>0.173</a:t>
+                        <a:t>0.556</a:t>
                       </a:r>
                     </a:p>
                   </a:txBody>
@@ -9114,7 +9258,7 @@
                           </a:solidFill>
                           <a:latin typeface="Calibri"/>
                         </a:rPr>
-                        <a:t>0.0002</a:t>
+                        <a:t>0.472</a:t>
                       </a:r>
                     </a:p>
                   </a:txBody>
@@ -9152,7 +9296,7 @@
                           </a:solidFill>
                           <a:latin typeface="Calibri"/>
                         </a:rPr>
-                        <a:t>0.712</a:t>
+                        <a:t>0.964</a:t>
                       </a:r>
                     </a:p>
                   </a:txBody>
@@ -9170,7 +9314,7 @@
                           </a:solidFill>
                           <a:latin typeface="Calibri"/>
                         </a:rPr>
-                        <a:t>0.668</a:t>
+                        <a:t>0.964</a:t>
                       </a:r>
                     </a:p>
                   </a:txBody>
@@ -9188,7 +9332,7 @@
                           </a:solidFill>
                           <a:latin typeface="Calibri"/>
                         </a:rPr>
-                        <a:t>0.032</a:t>
+                        <a:t>0.976</a:t>
                       </a:r>
                     </a:p>
                   </a:txBody>
@@ -9226,7 +9370,7 @@
                           </a:solidFill>
                           <a:latin typeface="Calibri"/>
                         </a:rPr>
-                        <a:t>0.483</a:t>
+                        <a:t>0.618</a:t>
                       </a:r>
                     </a:p>
                   </a:txBody>
@@ -9244,7 +9388,7 @@
                           </a:solidFill>
                           <a:latin typeface="Calibri"/>
                         </a:rPr>
-                        <a:t>0.500</a:t>
+                        <a:t>0.750</a:t>
                       </a:r>
                     </a:p>
                   </a:txBody>
@@ -9262,7 +9406,7 @@
                           </a:solidFill>
                           <a:latin typeface="Calibri"/>
                         </a:rPr>
-                        <a:t>0.32</a:t>
+                        <a:t>0.720</a:t>
                       </a:r>
                     </a:p>
                   </a:txBody>
@@ -9364,7 +9508,7 @@
                 </a:solidFill>
                 <a:latin typeface="Calibri"/>
               </a:rPr>
-              <a:t>Report the trade, not the aggregate</a:t>
+              <a:t>What verification changed</a:t>
             </a:r>
           </a:p>
         </p:txBody>
@@ -9403,7 +9547,7 @@
                 </a:solidFill>
                 <a:latin typeface="Calibri"/>
               </a:rPr>
-              <a:t>Overall Recall@5: 0.483 → 0.500, p = 0.32 — indistinguishable from noise.</a:t>
+              <a:t>On 180 synthetic probes the method looked like a trade: +0.131 cross-lingual,</a:t>
             </a:r>
           </a:p>
           <a:p>
@@ -9419,7 +9563,7 @@
                 </a:solidFill>
                 <a:latin typeface="Calibri"/>
               </a:rPr>
-              <a:t>Reporting only the aggregate would hide both the 7× cross-lingual gain</a:t>
+              <a:t>−0.044 monolingual, and +0.133 over dense alone cross-lingually.</a:t>
             </a:r>
           </a:p>
           <a:p>
@@ -9435,7 +9579,7 @@
                 </a:solidFill>
                 <a:latin typeface="Calibri"/>
               </a:rPr>
-              <a:t>and the 0.044 monolingual cost.</a:t>
+              <a:t>On the verified test split: the repair is larger (+0.411), the monolingual</a:t>
             </a:r>
           </a:p>
           <a:p>
@@ -9451,7 +9595,7 @@
                 </a:solidFill>
                 <a:latin typeface="Calibri"/>
               </a:rPr>
-              <a:t>Good trade on this corpus: monolingual was already strong, cross-lingual was</a:t>
+              <a:t>cost is gone, and the gain over dense alone is mostly gone (+0.024</a:t>
             </a:r>
           </a:p>
           <a:p>
@@ -9467,7 +9611,39 @@
                 </a:solidFill>
                 <a:latin typeface="Calibri"/>
               </a:rPr>
-              <a:t>near zero. On a mostly-monolingual deployment it would be a bad one.</a:t>
+              <a:t>cross-lingual, p = 0.62).</a:t>
+            </a:r>
+          </a:p>
+          <a:p>
+            <a:pPr>
+              <a:spcAft>
+                <a:spcPts val="600"/>
+              </a:spcAft>
+            </a:pPr>
+            <a:r>
+              <a:rPr sz="1800" b="0">
+                <a:solidFill>
+                  <a:srgbClr val="1A1A1A"/>
+                </a:solidFill>
+                <a:latin typeface="Calibri"/>
+              </a:rPr>
+              <a:t>Claim what survives: standard fusion does harm across scripts; the fix removes</a:t>
+            </a:r>
+          </a:p>
+          <a:p>
+            <a:pPr>
+              <a:spcAft>
+                <a:spcPts val="600"/>
+              </a:spcAft>
+            </a:pPr>
+            <a:r>
+              <a:rPr sz="1800" b="0">
+                <a:solidFill>
+                  <a:srgbClr val="1A1A1A"/>
+                </a:solidFill>
+                <a:latin typeface="Calibri"/>
+              </a:rPr>
+              <a:t>it. Not: fusion beats a strong dense retriever.</a:t>
             </a:r>
           </a:p>
         </p:txBody>

--- a/paper/IndicRAG-QA-slides.pptx
+++ b/paper/IndicRAG-QA-slides.pptx
@@ -657,7 +657,7 @@
           <a:lstStyle/>
           <a:p>
             <a:r>
-              <a:t>This is H3 and it is the cleanest result in the deck. The closed-book arm is not refusing — it is confidently reciting eligibility thresholds from memory and getting them wrong. Say the second line out loud: the unpaired rates (0.826 vs 0.762) look like a win only because the arms answer different numbers of questions. The paired test is what settles it.</a:t>
+              <a:t>This is H3 and it is the cleanest result in the deck. The closed-book arm is not refusing — it is confidently reciting scheme figures from memory and getting them wrong. Say the second line out loud: the fusion gain is real as retrieval, and small enough over dense alone that 72 questions cannot see it.</a:t>
             </a:r>
           </a:p>
         </p:txBody>
@@ -727,7 +727,7 @@
           <a:lstStyle/>
           <a:p>
             <a:r>
-              <a:t>The slide that stops the talk being a sales pitch. The fusion result is a claim about retrieval, measured as retrieval. It is not a claim that retrieval is what limits answer quality here. This ratio is a property of a 3B quantized model, not a law — but it is why the oracle arm exists.</a:t>
+              <a:t>The slide that stops the talk being a sales pitch: our headline number moved when the data got better, and we show it moving. The ratio is a property of a 3B quantized model, not a law — but it is why the oracle arm exists.</a:t>
             </a:r>
           </a:p>
         </p:txBody>
@@ -867,7 +867,7 @@
           <a:lstStyle/>
           <a:p>
             <a:r>
-              <a:t>The calibrated row is the one to dwell on — perfect recall, achieved by refusing every single question. Per-class recall of 1.000 everywhere means nothing when the system abstains unconditionally. Only the generator, which reads the passage, produces a system that answers anything. Adding NLI on top changes nothing: it had 2 false positives left to catch.</a:t>
+              <a:t>The threshold row is the one to dwell on — high recall, achieved by refusing almost every question. Only the generator, which reads the passage, catches near-misses while still answering. Adding NLI on top changes nothing: of the 25 it answers, 5 are unanswerable, and no entailment threshold improves on that. In deployment: BM25 floor first, generator abstention second.</a:t>
             </a:r>
           </a:p>
         </p:txBody>
@@ -5012,7 +5012,7 @@
                 </a:solidFill>
                 <a:latin typeface="Calibri"/>
               </a:rPr>
-              <a:t>Unverified items, 72-item sample — re-run on the test split pending.</a:t>
+              <a:t>Test split, 72-item stratified sample.</a:t>
             </a:r>
           </a:p>
           <a:p>
@@ -5028,7 +5028,7 @@
                 </a:solidFill>
                 <a:latin typeface="Calibri"/>
               </a:rPr>
-              <a:t>Closed-book answers 37 of 72 questions. 16% of those answers are supported</a:t>
+              <a:t>Closed-book answers 49 of 72 questions; fewer than 1 in 5 of those answers</a:t>
             </a:r>
           </a:p>
           <a:p>
@@ -5044,7 +5044,7 @@
                 </a:solidFill>
                 <a:latin typeface="Calibri"/>
               </a:rPr>
-              <a:t>by the evidence. Paired: +0.593, p = 0.0001.</a:t>
+              <a:t>is supported. Paired: +0.684, p = 0.0001.</a:t>
             </a:r>
           </a:p>
           <a:p>
@@ -5060,7 +5060,7 @@
                 </a:solidFill>
                 <a:latin typeface="Calibri"/>
               </a:rPr>
-              <a:t>Hybrid vs dense is NOT significant (+0.026, p = 1.00). Retrieval-or-not is</a:t>
+              <a:t>Hybrid vs dense is NOT significant (−0.027 token-F1, p = 0.55).</a:t>
             </a:r>
           </a:p>
           <a:p>
@@ -5076,7 +5076,23 @@
                 </a:solidFill>
                 <a:latin typeface="Calibri"/>
               </a:rPr>
-              <a:t>the large effect; which retriever does not show up downstream at n = 72.</a:t>
+              <a:t>Retrieval-or-not is the large effect; which retriever does not show up</a:t>
+            </a:r>
+          </a:p>
+          <a:p>
+            <a:pPr>
+              <a:spcAft>
+                <a:spcPts val="600"/>
+              </a:spcAft>
+            </a:pPr>
+            <a:r>
+              <a:rPr sz="1800" b="0">
+                <a:solidFill>
+                  <a:srgbClr val="1A1A1A"/>
+                </a:solidFill>
+                <a:latin typeface="Calibri"/>
+              </a:rPr>
+              <a:t>downstream at n = 72.</a:t>
             </a:r>
           </a:p>
         </p:txBody>
@@ -5090,7 +5106,7 @@
           <p:nvPr/>
         </p:nvGraphicFramePr>
         <p:xfrm>
-          <a:off x="640080" y="3767328"/>
+          <a:off x="640080" y="4151376"/>
           <a:ext cx="10058400" cy="1463040"/>
         </p:xfrm>
         <a:graphic>
@@ -5210,7 +5226,7 @@
                           </a:solidFill>
                           <a:latin typeface="Calibri"/>
                         </a:rPr>
-                        <a:t>0.065</a:t>
+                        <a:t>0.050</a:t>
                       </a:r>
                     </a:p>
                   </a:txBody>
@@ -5228,7 +5244,7 @@
                           </a:solidFill>
                           <a:latin typeface="Calibri"/>
                         </a:rPr>
-                        <a:t>0.486</a:t>
+                        <a:t>0.319</a:t>
                       </a:r>
                     </a:p>
                   </a:txBody>
@@ -5246,7 +5262,7 @@
                           </a:solidFill>
                           <a:latin typeface="Calibri"/>
                         </a:rPr>
-                        <a:t>0.162</a:t>
+                        <a:t>0.184</a:t>
                       </a:r>
                     </a:p>
                   </a:txBody>
@@ -5284,7 +5300,7 @@
                           </a:solidFill>
                           <a:latin typeface="Calibri"/>
                         </a:rPr>
-                        <a:t>0.207</a:t>
+                        <a:t>0.446</a:t>
                       </a:r>
                     </a:p>
                   </a:txBody>
@@ -5302,7 +5318,7 @@
                           </a:solidFill>
                           <a:latin typeface="Calibri"/>
                         </a:rPr>
-                        <a:t>0.417</a:t>
+                        <a:t>0.250</a:t>
                       </a:r>
                     </a:p>
                   </a:txBody>
@@ -5320,7 +5336,7 @@
                           </a:solidFill>
                           <a:latin typeface="Calibri"/>
                         </a:rPr>
-                        <a:t>0.762</a:t>
+                        <a:t>0.870</a:t>
                       </a:r>
                     </a:p>
                   </a:txBody>
@@ -5358,7 +5374,7 @@
                           </a:solidFill>
                           <a:latin typeface="Calibri"/>
                         </a:rPr>
-                        <a:t>0.210</a:t>
+                        <a:t>0.418</a:t>
                       </a:r>
                     </a:p>
                   </a:txBody>
@@ -5376,7 +5392,7 @@
                           </a:solidFill>
                           <a:latin typeface="Calibri"/>
                         </a:rPr>
-                        <a:t>0.361</a:t>
+                        <a:t>0.208</a:t>
                       </a:r>
                     </a:p>
                   </a:txBody>
@@ -5394,7 +5410,7 @@
                           </a:solidFill>
                           <a:latin typeface="Calibri"/>
                         </a:rPr>
-                        <a:t>0.826</a:t>
+                        <a:t>0.860</a:t>
                       </a:r>
                     </a:p>
                   </a:txBody>
@@ -5432,7 +5448,7 @@
                           </a:solidFill>
                           <a:latin typeface="Calibri"/>
                         </a:rPr>
-                        <a:t>0.403</a:t>
+                        <a:t>0.641</a:t>
                       </a:r>
                     </a:p>
                   </a:txBody>
@@ -5450,7 +5466,7 @@
                           </a:solidFill>
                           <a:latin typeface="Calibri"/>
                         </a:rPr>
-                        <a:t>0.194</a:t>
+                        <a:t>0.083</a:t>
                       </a:r>
                     </a:p>
                   </a:txBody>
@@ -5468,7 +5484,7 @@
                           </a:solidFill>
                           <a:latin typeface="Calibri"/>
                         </a:rPr>
-                        <a:t>0.948</a:t>
+                        <a:t>0.985</a:t>
                       </a:r>
                     </a:p>
                   </a:txBody>
@@ -5570,7 +5586,7 @@
                 </a:solidFill>
                 <a:latin typeface="Calibri"/>
               </a:rPr>
-              <a:t>But retrieval is not the bottleneck</a:t>
+              <a:t>Where the errors are</a:t>
             </a:r>
           </a:p>
         </p:txBody>
@@ -5609,7 +5625,7 @@
                 </a:solidFill>
                 <a:latin typeface="Calibri"/>
               </a:rPr>
-              <a:t>Unverified items, 72-item sample.</a:t>
+              <a:t>Test split, 72-item sample.</a:t>
             </a:r>
           </a:p>
           <a:p>
@@ -5625,7 +5641,7 @@
                 </a:solidFill>
                 <a:latin typeface="Calibri"/>
               </a:rPr>
-              <a:t>Fixing retrieval entirely buys 0.193. The 3B generator is losing 0.597.</a:t>
+              <a:t>Both matter. The generator loses more, by 1.6×.</a:t>
             </a:r>
           </a:p>
           <a:p>
@@ -5641,7 +5657,39 @@
                 </a:solidFill>
                 <a:latin typeface="Calibri"/>
               </a:rPr>
-              <a:t>Say this out loud: our own contribution improves the smaller of the two.</a:t>
+              <a:t>Say this out loud: before verification this was 0.597 against 0.193 — a</a:t>
+            </a:r>
+          </a:p>
+          <a:p>
+            <a:pPr>
+              <a:spcAft>
+                <a:spcPts val="600"/>
+              </a:spcAft>
+            </a:pPr>
+            <a:r>
+              <a:rPr sz="1800" b="0">
+                <a:solidFill>
+                  <a:srgbClr val="1A1A1A"/>
+                </a:solidFill>
+                <a:latin typeface="Calibri"/>
+              </a:rPr>
+              <a:t>factor of three — and we advised fixing the generator first. On verified items</a:t>
+            </a:r>
+          </a:p>
+          <a:p>
+            <a:pPr>
+              <a:spcAft>
+                <a:spcPts val="600"/>
+              </a:spcAft>
+            </a:pPr>
+            <a:r>
+              <a:rPr sz="1800" b="0">
+                <a:solidFill>
+                  <a:srgbClr val="1A1A1A"/>
+                </a:solidFill>
+                <a:latin typeface="Calibri"/>
+              </a:rPr>
+              <a:t>(and a different sample) it narrowed to 1.6. That advice did not survive.</a:t>
             </a:r>
           </a:p>
         </p:txBody>
@@ -5655,7 +5703,7 @@
           <p:nvPr/>
         </p:nvGraphicFramePr>
         <p:xfrm>
-          <a:off x="640080" y="2615184"/>
+          <a:off x="640080" y="3383280"/>
           <a:ext cx="10058400" cy="1170432"/>
         </p:xfrm>
         <a:graphic>
@@ -5699,7 +5747,7 @@
                           </a:solidFill>
                           <a:latin typeface="Calibri"/>
                         </a:rPr>
-                        <a:t>0.403</a:t>
+                        <a:t>0.641</a:t>
                       </a:r>
                     </a:p>
                   </a:txBody>
@@ -5737,7 +5785,7 @@
                           </a:solidFill>
                           <a:latin typeface="Calibri"/>
                         </a:rPr>
-                        <a:t>0.210</a:t>
+                        <a:t>0.418</a:t>
                       </a:r>
                     </a:p>
                   </a:txBody>
@@ -5775,7 +5823,7 @@
                           </a:solidFill>
                           <a:latin typeface="Calibri"/>
                         </a:rPr>
-                        <a:t>0.193</a:t>
+                        <a:t>0.223</a:t>
                       </a:r>
                     </a:p>
                   </a:txBody>
@@ -5813,7 +5861,7 @@
                           </a:solidFill>
                           <a:latin typeface="Calibri"/>
                         </a:rPr>
-                        <a:t>0.597</a:t>
+                        <a:t>0.359</a:t>
                       </a:r>
                     </a:p>
                   </a:txBody>
@@ -6281,7 +6329,7 @@
                 </a:solidFill>
                 <a:latin typeface="Calibri"/>
               </a:rPr>
-              <a:t>Four signals, same items (unverified set, enriched sample). Of 28 answerable</a:t>
+              <a:t>Four signals, same 85 held-out items (enriched: 57 unanswerable, 28 answerable).</a:t>
             </a:r>
           </a:p>
           <a:p>
@@ -6297,7 +6345,7 @@
                 </a:solidFill>
                 <a:latin typeface="Calibri"/>
               </a:rPr>
-              <a:t>questions, how many get answered?</a:t>
+              <a:t>Generator near-miss recall: 22 of 23.</a:t>
             </a:r>
           </a:p>
         </p:txBody>
@@ -6608,7 +6656,7 @@
                           </a:solidFill>
                           <a:latin typeface="Calibri"/>
                         </a:rPr>
-                        <a:t>retrieval threshold</a:t>
+                        <a:t>threshold on fused score</a:t>
                       </a:r>
                     </a:p>
                   </a:txBody>
@@ -6626,7 +6674,7 @@
                           </a:solidFill>
                           <a:latin typeface="Calibri"/>
                         </a:rPr>
-                        <a:t>53/56</a:t>
+                        <a:t>53/57</a:t>
                       </a:r>
                     </a:p>
                   </a:txBody>
@@ -6644,7 +6692,7 @@
                           </a:solidFill>
                           <a:latin typeface="Calibri"/>
                         </a:rPr>
-                        <a:t>6/28</a:t>
+                        <a:t>2/28</a:t>
                       </a:r>
                     </a:p>
                   </a:txBody>
@@ -6682,7 +6730,7 @@
                           </a:solidFill>
                           <a:latin typeface="Calibri"/>
                         </a:rPr>
-                        <a:t>56/56</a:t>
+                        <a:t>44/57</a:t>
                       </a:r>
                     </a:p>
                   </a:txBody>
@@ -6700,7 +6748,7 @@
                           </a:solidFill>
                           <a:latin typeface="Calibri"/>
                         </a:rPr>
-                        <a:t>0/28</a:t>
+                        <a:t>11/28</a:t>
                       </a:r>
                     </a:p>
                   </a:txBody>
@@ -6738,7 +6786,7 @@
                           </a:solidFill>
                           <a:latin typeface="Calibri"/>
                         </a:rPr>
-                        <a:t>52/56</a:t>
+                        <a:t>52/57</a:t>
                       </a:r>
                     </a:p>
                   </a:txBody>
@@ -6756,7 +6804,7 @@
                           </a:solidFill>
                           <a:latin typeface="Calibri"/>
                         </a:rPr>
-                        <a:t>17/28</a:t>
+                        <a:t>20/28</a:t>
                       </a:r>
                     </a:p>
                   </a:txBody>

--- a/paper/IndicRAG-QA-slides.pptx
+++ b/paper/IndicRAG-QA-slides.pptx
@@ -9611,7 +9611,23 @@
                 </a:solidFill>
                 <a:latin typeface="Calibri"/>
               </a:rPr>
-              <a:t>−0.044 monolingual, and +0.133 over dense alone cross-lingually.</a:t>
+              <a:t>−0.044 monolingual. On the unverified questions it beat dense alone by</a:t>
+            </a:r>
+          </a:p>
+          <a:p>
+            <a:pPr>
+              <a:spcAft>
+                <a:spcPts val="600"/>
+              </a:spcAft>
+            </a:pPr>
+            <a:r>
+              <a:rPr sz="1800" b="0">
+                <a:solidFill>
+                  <a:srgbClr val="1A1A1A"/>
+                </a:solidFill>
+                <a:latin typeface="Calibri"/>
+              </a:rPr>
+              <a:t>+0.133 cross-lingually.</a:t>
             </a:r>
           </a:p>
           <a:p>

--- a/paper/IndicRAG-QA-slides.pptx
+++ b/paper/IndicRAG-QA-slides.pptx
@@ -6977,7 +6977,7 @@
                 </a:solidFill>
                 <a:latin typeface="Calibri"/>
               </a:rPr>
-              <a:t>- 393 items, verified by a model, not a person; blind second pass κ = 1.000</a:t>
+              <a:t>- 393 items: two model passes, then one person reviewed the test split, not</a:t>
             </a:r>
           </a:p>
           <a:p>
@@ -6993,7 +6993,23 @@
                 </a:solidFill>
                 <a:latin typeface="Calibri"/>
               </a:rPr>
-              <a:t>is one model agreeing with itself, not the 0.70 inter-annotator gate</a:t>
+              <a:t>blind; dev split model-only; blind second pass κ = 1.000 is one model agreeing</a:t>
+            </a:r>
+          </a:p>
+          <a:p>
+            <a:pPr>
+              <a:spcAft>
+                <a:spcPts val="600"/>
+              </a:spcAft>
+            </a:pPr>
+            <a:r>
+              <a:rPr sz="1800" b="0">
+                <a:solidFill>
+                  <a:srgbClr val="1A1A1A"/>
+                </a:solidFill>
+                <a:latin typeface="Calibri"/>
+              </a:rPr>
+              <a:t>with itself, not the 0.70 inter-annotator gate</a:t>
             </a:r>
           </a:p>
           <a:p>
@@ -8014,7 +8030,7 @@
                 </a:solidFill>
                 <a:latin typeface="Calibri"/>
               </a:rPr>
-              <a:t>- Verified by a language model, not a person — disclosed on every report</a:t>
+              <a:t>- Verified in two model passes; test split reviewed by a person (all 273 accepted)</a:t>
             </a:r>
           </a:p>
           <a:p>

--- a/paper/IndicRAG-QA-slides.pptx
+++ b/paper/IndicRAG-QA-slides.pptx
@@ -1007,7 +1007,7 @@
           <a:lstStyle/>
           <a:p>
             <a:r>
-              <a:t>Three sentences, then stop.</a:t>
+              <a:t>Three sentences, then stop. Leave the link on screen for questions.</a:t>
             </a:r>
           </a:p>
         </p:txBody>
@@ -4663,6 +4663,22 @@
                 <a:latin typeface="Calibri"/>
               </a:rPr>
               <a:t>IndicRAG-QA · CSET 346 · Bennett University</a:t>
+            </a:r>
+          </a:p>
+          <a:p>
+            <a:pPr>
+              <a:spcAft>
+                <a:spcPts val="600"/>
+              </a:spcAft>
+            </a:pPr>
+            <a:r>
+              <a:rPr sz="2000" b="0">
+                <a:solidFill>
+                  <a:srgbClr val="5A5A5A"/>
+                </a:solidFill>
+                <a:latin typeface="Calibri"/>
+              </a:rPr>
+              <a:t>indicragqa.vercel.app</a:t>
             </a:r>
           </a:p>
         </p:txBody>
@@ -7241,6 +7257,22 @@
                 <a:latin typeface="Calibri"/>
               </a:rPr>
               <a:t>Found by reading 20 cases, not by reading a table.</a:t>
+            </a:r>
+          </a:p>
+          <a:p>
+            <a:pPr>
+              <a:spcAft>
+                <a:spcPts val="600"/>
+              </a:spcAft>
+            </a:pPr>
+            <a:r>
+              <a:rPr sz="1800" b="0">
+                <a:solidFill>
+                  <a:srgbClr val="1A1A1A"/>
+                </a:solidFill>
+                <a:latin typeface="Calibri"/>
+              </a:rPr>
+              <a:t>Try it: indicragqa.vercel.app</a:t>
             </a:r>
           </a:p>
         </p:txBody>
